--- a/solar/docs/solar_data_pipeline.pptx
+++ b/solar/docs/solar_data_pipeline.pptx
@@ -108,7 +108,7 @@
   <p:extLst>
     <p:ext uri="{521415D9-36F7-43E2-AB2F-B90AF26B5E84}">
       <p14:sectionLst xmlns:p14="http://schemas.microsoft.com/office/powerpoint/2010/main">
-        <p14:section name="Luồng dữ liệu" id="{0ff861a0-1fcb-f446-762f-c15fdc0f3449}">
+        <p14:section name="Luồng dữ liệu" id="{3d2e9f5e-ad69-e44c-855b-f1f2f968b58e}">
           <p14:sldIdLst>
             <p14:sldId id="256"/>
             <p14:sldId id="257"/>
@@ -4202,45 +4202,6 @@
                 </c:pt>
                 <c:pt idx="460">
                   <c:v>2.457</c:v>
-                </c:pt>
-                <c:pt idx="461">
-                  <c:v/>
-                </c:pt>
-                <c:pt idx="462">
-                  <c:v/>
-                </c:pt>
-                <c:pt idx="463">
-                  <c:v/>
-                </c:pt>
-                <c:pt idx="464">
-                  <c:v/>
-                </c:pt>
-                <c:pt idx="465">
-                  <c:v/>
-                </c:pt>
-                <c:pt idx="466">
-                  <c:v/>
-                </c:pt>
-                <c:pt idx="467">
-                  <c:v/>
-                </c:pt>
-                <c:pt idx="468">
-                  <c:v/>
-                </c:pt>
-                <c:pt idx="469">
-                  <c:v/>
-                </c:pt>
-                <c:pt idx="470">
-                  <c:v/>
-                </c:pt>
-                <c:pt idx="471">
-                  <c:v/>
-                </c:pt>
-                <c:pt idx="472">
-                  <c:v/>
-                </c:pt>
-                <c:pt idx="473">
-                  <c:v/>
                 </c:pt>
                 <c:pt idx="474">
                   <c:v>2.106</c:v>
@@ -5584,7 +5545,7 @@
               <a:solidFill>
                 <a:srgbClr val="E89B0C"/>
               </a:solidFill>
-              <a:prstDash val="solid,dash"/>
+              <a:prstDash val="solid"/>
               <a:round/>
             </a:ln>
             <a:effectLst/>
@@ -5640,506 +5601,23 @@
                   <c:pt idx="0">
                     <c:v>13/06</c:v>
                   </c:pt>
-                  <c:pt idx="1">
-                    <c:v/>
-                  </c:pt>
-                  <c:pt idx="2">
-                    <c:v/>
-                  </c:pt>
-                  <c:pt idx="3">
-                    <c:v/>
-                  </c:pt>
-                  <c:pt idx="4">
-                    <c:v/>
-                  </c:pt>
-                  <c:pt idx="5">
-                    <c:v/>
-                  </c:pt>
-                  <c:pt idx="6">
-                    <c:v/>
-                  </c:pt>
-                  <c:pt idx="7">
-                    <c:v/>
-                  </c:pt>
-                  <c:pt idx="8">
-                    <c:v/>
-                  </c:pt>
-                  <c:pt idx="9">
-                    <c:v/>
-                  </c:pt>
-                  <c:pt idx="10">
-                    <c:v/>
-                  </c:pt>
-                  <c:pt idx="11">
-                    <c:v/>
-                  </c:pt>
-                  <c:pt idx="12">
-                    <c:v/>
-                  </c:pt>
-                  <c:pt idx="13">
-                    <c:v/>
-                  </c:pt>
-                  <c:pt idx="14">
-                    <c:v/>
-                  </c:pt>
-                  <c:pt idx="15">
-                    <c:v/>
-                  </c:pt>
-                  <c:pt idx="16">
-                    <c:v/>
-                  </c:pt>
-                  <c:pt idx="17">
-                    <c:v/>
-                  </c:pt>
-                  <c:pt idx="18">
-                    <c:v/>
-                  </c:pt>
-                  <c:pt idx="19">
-                    <c:v/>
-                  </c:pt>
-                  <c:pt idx="20">
-                    <c:v/>
-                  </c:pt>
-                  <c:pt idx="21">
-                    <c:v/>
-                  </c:pt>
-                  <c:pt idx="22">
-                    <c:v/>
-                  </c:pt>
-                  <c:pt idx="23">
-                    <c:v/>
-                  </c:pt>
                   <c:pt idx="24">
                     <c:v>14/06</c:v>
                   </c:pt>
-                  <c:pt idx="25">
-                    <c:v/>
-                  </c:pt>
-                  <c:pt idx="26">
-                    <c:v/>
-                  </c:pt>
-                  <c:pt idx="27">
-                    <c:v/>
-                  </c:pt>
-                  <c:pt idx="28">
-                    <c:v/>
-                  </c:pt>
-                  <c:pt idx="29">
-                    <c:v/>
-                  </c:pt>
-                  <c:pt idx="30">
-                    <c:v/>
-                  </c:pt>
-                  <c:pt idx="31">
-                    <c:v/>
-                  </c:pt>
-                  <c:pt idx="32">
-                    <c:v/>
-                  </c:pt>
-                  <c:pt idx="33">
-                    <c:v/>
-                  </c:pt>
-                  <c:pt idx="34">
-                    <c:v/>
-                  </c:pt>
-                  <c:pt idx="35">
-                    <c:v/>
-                  </c:pt>
-                  <c:pt idx="36">
-                    <c:v/>
-                  </c:pt>
-                  <c:pt idx="37">
-                    <c:v/>
-                  </c:pt>
-                  <c:pt idx="38">
-                    <c:v/>
-                  </c:pt>
-                  <c:pt idx="39">
-                    <c:v/>
-                  </c:pt>
-                  <c:pt idx="40">
-                    <c:v/>
-                  </c:pt>
-                  <c:pt idx="41">
-                    <c:v/>
-                  </c:pt>
-                  <c:pt idx="42">
-                    <c:v/>
-                  </c:pt>
-                  <c:pt idx="43">
-                    <c:v/>
-                  </c:pt>
-                  <c:pt idx="44">
-                    <c:v/>
-                  </c:pt>
-                  <c:pt idx="45">
-                    <c:v/>
-                  </c:pt>
-                  <c:pt idx="46">
-                    <c:v/>
-                  </c:pt>
-                  <c:pt idx="47">
-                    <c:v/>
-                  </c:pt>
                   <c:pt idx="48">
                     <c:v>15/06</c:v>
                   </c:pt>
-                  <c:pt idx="49">
-                    <c:v/>
-                  </c:pt>
-                  <c:pt idx="50">
-                    <c:v/>
-                  </c:pt>
-                  <c:pt idx="51">
-                    <c:v/>
-                  </c:pt>
-                  <c:pt idx="52">
-                    <c:v/>
-                  </c:pt>
-                  <c:pt idx="53">
-                    <c:v/>
-                  </c:pt>
-                  <c:pt idx="54">
-                    <c:v/>
-                  </c:pt>
-                  <c:pt idx="55">
-                    <c:v/>
-                  </c:pt>
-                  <c:pt idx="56">
-                    <c:v/>
-                  </c:pt>
-                  <c:pt idx="57">
-                    <c:v/>
-                  </c:pt>
-                  <c:pt idx="58">
-                    <c:v/>
-                  </c:pt>
-                  <c:pt idx="59">
-                    <c:v/>
-                  </c:pt>
-                  <c:pt idx="60">
-                    <c:v/>
-                  </c:pt>
-                  <c:pt idx="61">
-                    <c:v/>
-                  </c:pt>
-                  <c:pt idx="62">
-                    <c:v/>
-                  </c:pt>
-                  <c:pt idx="63">
-                    <c:v/>
-                  </c:pt>
-                  <c:pt idx="64">
-                    <c:v/>
-                  </c:pt>
-                  <c:pt idx="65">
-                    <c:v/>
-                  </c:pt>
-                  <c:pt idx="66">
-                    <c:v/>
-                  </c:pt>
-                  <c:pt idx="67">
-                    <c:v/>
-                  </c:pt>
-                  <c:pt idx="68">
-                    <c:v/>
-                  </c:pt>
-                  <c:pt idx="69">
-                    <c:v/>
-                  </c:pt>
-                  <c:pt idx="70">
-                    <c:v/>
-                  </c:pt>
-                  <c:pt idx="71">
-                    <c:v/>
-                  </c:pt>
                   <c:pt idx="72">
                     <c:v>16/06</c:v>
                   </c:pt>
-                  <c:pt idx="73">
-                    <c:v/>
-                  </c:pt>
-                  <c:pt idx="74">
-                    <c:v/>
-                  </c:pt>
-                  <c:pt idx="75">
-                    <c:v/>
-                  </c:pt>
-                  <c:pt idx="76">
-                    <c:v/>
-                  </c:pt>
-                  <c:pt idx="77">
-                    <c:v/>
-                  </c:pt>
-                  <c:pt idx="78">
-                    <c:v/>
-                  </c:pt>
-                  <c:pt idx="79">
-                    <c:v/>
-                  </c:pt>
-                  <c:pt idx="80">
-                    <c:v/>
-                  </c:pt>
-                  <c:pt idx="81">
-                    <c:v/>
-                  </c:pt>
-                  <c:pt idx="82">
-                    <c:v/>
-                  </c:pt>
-                  <c:pt idx="83">
-                    <c:v/>
-                  </c:pt>
-                  <c:pt idx="84">
-                    <c:v/>
-                  </c:pt>
-                  <c:pt idx="85">
-                    <c:v/>
-                  </c:pt>
-                  <c:pt idx="86">
-                    <c:v/>
-                  </c:pt>
-                  <c:pt idx="87">
-                    <c:v/>
-                  </c:pt>
-                  <c:pt idx="88">
-                    <c:v/>
-                  </c:pt>
-                  <c:pt idx="89">
-                    <c:v/>
-                  </c:pt>
-                  <c:pt idx="90">
-                    <c:v/>
-                  </c:pt>
-                  <c:pt idx="91">
-                    <c:v/>
-                  </c:pt>
-                  <c:pt idx="92">
-                    <c:v/>
-                  </c:pt>
-                  <c:pt idx="93">
-                    <c:v/>
-                  </c:pt>
-                  <c:pt idx="94">
-                    <c:v/>
-                  </c:pt>
-                  <c:pt idx="95">
-                    <c:v/>
-                  </c:pt>
                   <c:pt idx="96">
                     <c:v>17/06</c:v>
                   </c:pt>
-                  <c:pt idx="97">
-                    <c:v/>
-                  </c:pt>
-                  <c:pt idx="98">
-                    <c:v/>
-                  </c:pt>
-                  <c:pt idx="99">
-                    <c:v/>
-                  </c:pt>
-                  <c:pt idx="100">
-                    <c:v/>
-                  </c:pt>
-                  <c:pt idx="101">
-                    <c:v/>
-                  </c:pt>
-                  <c:pt idx="102">
-                    <c:v/>
-                  </c:pt>
-                  <c:pt idx="103">
-                    <c:v/>
-                  </c:pt>
-                  <c:pt idx="104">
-                    <c:v/>
-                  </c:pt>
-                  <c:pt idx="105">
-                    <c:v/>
-                  </c:pt>
-                  <c:pt idx="106">
-                    <c:v/>
-                  </c:pt>
-                  <c:pt idx="107">
-                    <c:v/>
-                  </c:pt>
-                  <c:pt idx="108">
-                    <c:v/>
-                  </c:pt>
-                  <c:pt idx="109">
-                    <c:v/>
-                  </c:pt>
-                  <c:pt idx="110">
-                    <c:v/>
-                  </c:pt>
-                  <c:pt idx="111">
-                    <c:v/>
-                  </c:pt>
-                  <c:pt idx="112">
-                    <c:v/>
-                  </c:pt>
-                  <c:pt idx="113">
-                    <c:v/>
-                  </c:pt>
-                  <c:pt idx="114">
-                    <c:v/>
-                  </c:pt>
-                  <c:pt idx="115">
-                    <c:v/>
-                  </c:pt>
-                  <c:pt idx="116">
-                    <c:v/>
-                  </c:pt>
-                  <c:pt idx="117">
-                    <c:v/>
-                  </c:pt>
-                  <c:pt idx="118">
-                    <c:v/>
-                  </c:pt>
-                  <c:pt idx="119">
-                    <c:v/>
-                  </c:pt>
                   <c:pt idx="120">
                     <c:v>18/06</c:v>
                   </c:pt>
-                  <c:pt idx="121">
-                    <c:v/>
-                  </c:pt>
-                  <c:pt idx="122">
-                    <c:v/>
-                  </c:pt>
-                  <c:pt idx="123">
-                    <c:v/>
-                  </c:pt>
-                  <c:pt idx="124">
-                    <c:v/>
-                  </c:pt>
-                  <c:pt idx="125">
-                    <c:v/>
-                  </c:pt>
-                  <c:pt idx="126">
-                    <c:v/>
-                  </c:pt>
-                  <c:pt idx="127">
-                    <c:v/>
-                  </c:pt>
-                  <c:pt idx="128">
-                    <c:v/>
-                  </c:pt>
-                  <c:pt idx="129">
-                    <c:v/>
-                  </c:pt>
-                  <c:pt idx="130">
-                    <c:v/>
-                  </c:pt>
-                  <c:pt idx="131">
-                    <c:v/>
-                  </c:pt>
-                  <c:pt idx="132">
-                    <c:v/>
-                  </c:pt>
-                  <c:pt idx="133">
-                    <c:v/>
-                  </c:pt>
-                  <c:pt idx="134">
-                    <c:v/>
-                  </c:pt>
-                  <c:pt idx="135">
-                    <c:v/>
-                  </c:pt>
-                  <c:pt idx="136">
-                    <c:v/>
-                  </c:pt>
-                  <c:pt idx="137">
-                    <c:v/>
-                  </c:pt>
-                  <c:pt idx="138">
-                    <c:v/>
-                  </c:pt>
-                  <c:pt idx="139">
-                    <c:v/>
-                  </c:pt>
-                  <c:pt idx="140">
-                    <c:v/>
-                  </c:pt>
-                  <c:pt idx="141">
-                    <c:v/>
-                  </c:pt>
-                  <c:pt idx="142">
-                    <c:v/>
-                  </c:pt>
-                  <c:pt idx="143">
-                    <c:v/>
-                  </c:pt>
                   <c:pt idx="144">
                     <c:v>19/06</c:v>
-                  </c:pt>
-                  <c:pt idx="145">
-                    <c:v/>
-                  </c:pt>
-                  <c:pt idx="146">
-                    <c:v/>
-                  </c:pt>
-                  <c:pt idx="147">
-                    <c:v/>
-                  </c:pt>
-                  <c:pt idx="148">
-                    <c:v/>
-                  </c:pt>
-                  <c:pt idx="149">
-                    <c:v/>
-                  </c:pt>
-                  <c:pt idx="150">
-                    <c:v/>
-                  </c:pt>
-                  <c:pt idx="151">
-                    <c:v/>
-                  </c:pt>
-                  <c:pt idx="152">
-                    <c:v/>
-                  </c:pt>
-                  <c:pt idx="153">
-                    <c:v/>
-                  </c:pt>
-                  <c:pt idx="154">
-                    <c:v/>
-                  </c:pt>
-                  <c:pt idx="155">
-                    <c:v/>
-                  </c:pt>
-                  <c:pt idx="156">
-                    <c:v/>
-                  </c:pt>
-                  <c:pt idx="157">
-                    <c:v/>
-                  </c:pt>
-                  <c:pt idx="158">
-                    <c:v/>
-                  </c:pt>
-                  <c:pt idx="159">
-                    <c:v/>
-                  </c:pt>
-                  <c:pt idx="160">
-                    <c:v/>
-                  </c:pt>
-                  <c:pt idx="161">
-                    <c:v/>
-                  </c:pt>
-                  <c:pt idx="162">
-                    <c:v/>
-                  </c:pt>
-                  <c:pt idx="163">
-                    <c:v/>
-                  </c:pt>
-                  <c:pt idx="164">
-                    <c:v/>
-                  </c:pt>
-                  <c:pt idx="165">
-                    <c:v/>
-                  </c:pt>
-                  <c:pt idx="166">
-                    <c:v/>
-                  </c:pt>
-                  <c:pt idx="167">
-                    <c:v/>
                   </c:pt>
                 </c:lvl>
               </c:multiLvlStrCache>
@@ -6337,24 +5815,6 @@
                 <c:pt idx="61">
                   <c:v>2.184</c:v>
                 </c:pt>
-                <c:pt idx="62">
-                  <c:v/>
-                </c:pt>
-                <c:pt idx="63">
-                  <c:v/>
-                </c:pt>
-                <c:pt idx="64">
-                  <c:v/>
-                </c:pt>
-                <c:pt idx="65">
-                  <c:v/>
-                </c:pt>
-                <c:pt idx="66">
-                  <c:v/>
-                </c:pt>
-                <c:pt idx="67">
-                  <c:v/>
-                </c:pt>
                 <c:pt idx="68">
                   <c:v>0</c:v>
                 </c:pt>
@@ -6394,39 +5854,6 @@
                 <c:pt idx="80">
                   <c:v>0</c:v>
                 </c:pt>
-                <c:pt idx="81">
-                  <c:v/>
-                </c:pt>
-                <c:pt idx="82">
-                  <c:v/>
-                </c:pt>
-                <c:pt idx="83">
-                  <c:v/>
-                </c:pt>
-                <c:pt idx="84">
-                  <c:v/>
-                </c:pt>
-                <c:pt idx="85">
-                  <c:v/>
-                </c:pt>
-                <c:pt idx="86">
-                  <c:v/>
-                </c:pt>
-                <c:pt idx="87">
-                  <c:v/>
-                </c:pt>
-                <c:pt idx="88">
-                  <c:v/>
-                </c:pt>
-                <c:pt idx="89">
-                  <c:v/>
-                </c:pt>
-                <c:pt idx="90">
-                  <c:v/>
-                </c:pt>
-                <c:pt idx="91">
-                  <c:v/>
-                </c:pt>
                 <c:pt idx="92">
                   <c:v>0</c:v>
                 </c:pt>
@@ -6465,39 +5892,6 @@
                 </c:pt>
                 <c:pt idx="104">
                   <c:v>0</c:v>
-                </c:pt>
-                <c:pt idx="105">
-                  <c:v/>
-                </c:pt>
-                <c:pt idx="106">
-                  <c:v/>
-                </c:pt>
-                <c:pt idx="107">
-                  <c:v/>
-                </c:pt>
-                <c:pt idx="108">
-                  <c:v/>
-                </c:pt>
-                <c:pt idx="109">
-                  <c:v/>
-                </c:pt>
-                <c:pt idx="110">
-                  <c:v/>
-                </c:pt>
-                <c:pt idx="111">
-                  <c:v/>
-                </c:pt>
-                <c:pt idx="112">
-                  <c:v/>
-                </c:pt>
-                <c:pt idx="113">
-                  <c:v/>
-                </c:pt>
-                <c:pt idx="114">
-                  <c:v/>
-                </c:pt>
-                <c:pt idx="115">
-                  <c:v/>
                 </c:pt>
                 <c:pt idx="116">
                   <c:v>0</c:v>
@@ -6682,7 +6076,7 @@
               <a:solidFill>
                 <a:srgbClr val="2A9D8F"/>
               </a:solidFill>
-              <a:prstDash val="solid,dash"/>
+              <a:prstDash val="dash"/>
               <a:round/>
             </a:ln>
             <a:effectLst/>
@@ -6738,506 +6132,23 @@
                   <c:pt idx="0">
                     <c:v>13/06</c:v>
                   </c:pt>
-                  <c:pt idx="1">
-                    <c:v/>
-                  </c:pt>
-                  <c:pt idx="2">
-                    <c:v/>
-                  </c:pt>
-                  <c:pt idx="3">
-                    <c:v/>
-                  </c:pt>
-                  <c:pt idx="4">
-                    <c:v/>
-                  </c:pt>
-                  <c:pt idx="5">
-                    <c:v/>
-                  </c:pt>
-                  <c:pt idx="6">
-                    <c:v/>
-                  </c:pt>
-                  <c:pt idx="7">
-                    <c:v/>
-                  </c:pt>
-                  <c:pt idx="8">
-                    <c:v/>
-                  </c:pt>
-                  <c:pt idx="9">
-                    <c:v/>
-                  </c:pt>
-                  <c:pt idx="10">
-                    <c:v/>
-                  </c:pt>
-                  <c:pt idx="11">
-                    <c:v/>
-                  </c:pt>
-                  <c:pt idx="12">
-                    <c:v/>
-                  </c:pt>
-                  <c:pt idx="13">
-                    <c:v/>
-                  </c:pt>
-                  <c:pt idx="14">
-                    <c:v/>
-                  </c:pt>
-                  <c:pt idx="15">
-                    <c:v/>
-                  </c:pt>
-                  <c:pt idx="16">
-                    <c:v/>
-                  </c:pt>
-                  <c:pt idx="17">
-                    <c:v/>
-                  </c:pt>
-                  <c:pt idx="18">
-                    <c:v/>
-                  </c:pt>
-                  <c:pt idx="19">
-                    <c:v/>
-                  </c:pt>
-                  <c:pt idx="20">
-                    <c:v/>
-                  </c:pt>
-                  <c:pt idx="21">
-                    <c:v/>
-                  </c:pt>
-                  <c:pt idx="22">
-                    <c:v/>
-                  </c:pt>
-                  <c:pt idx="23">
-                    <c:v/>
-                  </c:pt>
                   <c:pt idx="24">
                     <c:v>14/06</c:v>
                   </c:pt>
-                  <c:pt idx="25">
-                    <c:v/>
-                  </c:pt>
-                  <c:pt idx="26">
-                    <c:v/>
-                  </c:pt>
-                  <c:pt idx="27">
-                    <c:v/>
-                  </c:pt>
-                  <c:pt idx="28">
-                    <c:v/>
-                  </c:pt>
-                  <c:pt idx="29">
-                    <c:v/>
-                  </c:pt>
-                  <c:pt idx="30">
-                    <c:v/>
-                  </c:pt>
-                  <c:pt idx="31">
-                    <c:v/>
-                  </c:pt>
-                  <c:pt idx="32">
-                    <c:v/>
-                  </c:pt>
-                  <c:pt idx="33">
-                    <c:v/>
-                  </c:pt>
-                  <c:pt idx="34">
-                    <c:v/>
-                  </c:pt>
-                  <c:pt idx="35">
-                    <c:v/>
-                  </c:pt>
-                  <c:pt idx="36">
-                    <c:v/>
-                  </c:pt>
-                  <c:pt idx="37">
-                    <c:v/>
-                  </c:pt>
-                  <c:pt idx="38">
-                    <c:v/>
-                  </c:pt>
-                  <c:pt idx="39">
-                    <c:v/>
-                  </c:pt>
-                  <c:pt idx="40">
-                    <c:v/>
-                  </c:pt>
-                  <c:pt idx="41">
-                    <c:v/>
-                  </c:pt>
-                  <c:pt idx="42">
-                    <c:v/>
-                  </c:pt>
-                  <c:pt idx="43">
-                    <c:v/>
-                  </c:pt>
-                  <c:pt idx="44">
-                    <c:v/>
-                  </c:pt>
-                  <c:pt idx="45">
-                    <c:v/>
-                  </c:pt>
-                  <c:pt idx="46">
-                    <c:v/>
-                  </c:pt>
-                  <c:pt idx="47">
-                    <c:v/>
-                  </c:pt>
                   <c:pt idx="48">
                     <c:v>15/06</c:v>
                   </c:pt>
-                  <c:pt idx="49">
-                    <c:v/>
-                  </c:pt>
-                  <c:pt idx="50">
-                    <c:v/>
-                  </c:pt>
-                  <c:pt idx="51">
-                    <c:v/>
-                  </c:pt>
-                  <c:pt idx="52">
-                    <c:v/>
-                  </c:pt>
-                  <c:pt idx="53">
-                    <c:v/>
-                  </c:pt>
-                  <c:pt idx="54">
-                    <c:v/>
-                  </c:pt>
-                  <c:pt idx="55">
-                    <c:v/>
-                  </c:pt>
-                  <c:pt idx="56">
-                    <c:v/>
-                  </c:pt>
-                  <c:pt idx="57">
-                    <c:v/>
-                  </c:pt>
-                  <c:pt idx="58">
-                    <c:v/>
-                  </c:pt>
-                  <c:pt idx="59">
-                    <c:v/>
-                  </c:pt>
-                  <c:pt idx="60">
-                    <c:v/>
-                  </c:pt>
-                  <c:pt idx="61">
-                    <c:v/>
-                  </c:pt>
-                  <c:pt idx="62">
-                    <c:v/>
-                  </c:pt>
-                  <c:pt idx="63">
-                    <c:v/>
-                  </c:pt>
-                  <c:pt idx="64">
-                    <c:v/>
-                  </c:pt>
-                  <c:pt idx="65">
-                    <c:v/>
-                  </c:pt>
-                  <c:pt idx="66">
-                    <c:v/>
-                  </c:pt>
-                  <c:pt idx="67">
-                    <c:v/>
-                  </c:pt>
-                  <c:pt idx="68">
-                    <c:v/>
-                  </c:pt>
-                  <c:pt idx="69">
-                    <c:v/>
-                  </c:pt>
-                  <c:pt idx="70">
-                    <c:v/>
-                  </c:pt>
-                  <c:pt idx="71">
-                    <c:v/>
-                  </c:pt>
                   <c:pt idx="72">
                     <c:v>16/06</c:v>
                   </c:pt>
-                  <c:pt idx="73">
-                    <c:v/>
-                  </c:pt>
-                  <c:pt idx="74">
-                    <c:v/>
-                  </c:pt>
-                  <c:pt idx="75">
-                    <c:v/>
-                  </c:pt>
-                  <c:pt idx="76">
-                    <c:v/>
-                  </c:pt>
-                  <c:pt idx="77">
-                    <c:v/>
-                  </c:pt>
-                  <c:pt idx="78">
-                    <c:v/>
-                  </c:pt>
-                  <c:pt idx="79">
-                    <c:v/>
-                  </c:pt>
-                  <c:pt idx="80">
-                    <c:v/>
-                  </c:pt>
-                  <c:pt idx="81">
-                    <c:v/>
-                  </c:pt>
-                  <c:pt idx="82">
-                    <c:v/>
-                  </c:pt>
-                  <c:pt idx="83">
-                    <c:v/>
-                  </c:pt>
-                  <c:pt idx="84">
-                    <c:v/>
-                  </c:pt>
-                  <c:pt idx="85">
-                    <c:v/>
-                  </c:pt>
-                  <c:pt idx="86">
-                    <c:v/>
-                  </c:pt>
-                  <c:pt idx="87">
-                    <c:v/>
-                  </c:pt>
-                  <c:pt idx="88">
-                    <c:v/>
-                  </c:pt>
-                  <c:pt idx="89">
-                    <c:v/>
-                  </c:pt>
-                  <c:pt idx="90">
-                    <c:v/>
-                  </c:pt>
-                  <c:pt idx="91">
-                    <c:v/>
-                  </c:pt>
-                  <c:pt idx="92">
-                    <c:v/>
-                  </c:pt>
-                  <c:pt idx="93">
-                    <c:v/>
-                  </c:pt>
-                  <c:pt idx="94">
-                    <c:v/>
-                  </c:pt>
-                  <c:pt idx="95">
-                    <c:v/>
-                  </c:pt>
                   <c:pt idx="96">
                     <c:v>17/06</c:v>
                   </c:pt>
-                  <c:pt idx="97">
-                    <c:v/>
-                  </c:pt>
-                  <c:pt idx="98">
-                    <c:v/>
-                  </c:pt>
-                  <c:pt idx="99">
-                    <c:v/>
-                  </c:pt>
-                  <c:pt idx="100">
-                    <c:v/>
-                  </c:pt>
-                  <c:pt idx="101">
-                    <c:v/>
-                  </c:pt>
-                  <c:pt idx="102">
-                    <c:v/>
-                  </c:pt>
-                  <c:pt idx="103">
-                    <c:v/>
-                  </c:pt>
-                  <c:pt idx="104">
-                    <c:v/>
-                  </c:pt>
-                  <c:pt idx="105">
-                    <c:v/>
-                  </c:pt>
-                  <c:pt idx="106">
-                    <c:v/>
-                  </c:pt>
-                  <c:pt idx="107">
-                    <c:v/>
-                  </c:pt>
-                  <c:pt idx="108">
-                    <c:v/>
-                  </c:pt>
-                  <c:pt idx="109">
-                    <c:v/>
-                  </c:pt>
-                  <c:pt idx="110">
-                    <c:v/>
-                  </c:pt>
-                  <c:pt idx="111">
-                    <c:v/>
-                  </c:pt>
-                  <c:pt idx="112">
-                    <c:v/>
-                  </c:pt>
-                  <c:pt idx="113">
-                    <c:v/>
-                  </c:pt>
-                  <c:pt idx="114">
-                    <c:v/>
-                  </c:pt>
-                  <c:pt idx="115">
-                    <c:v/>
-                  </c:pt>
-                  <c:pt idx="116">
-                    <c:v/>
-                  </c:pt>
-                  <c:pt idx="117">
-                    <c:v/>
-                  </c:pt>
-                  <c:pt idx="118">
-                    <c:v/>
-                  </c:pt>
-                  <c:pt idx="119">
-                    <c:v/>
-                  </c:pt>
                   <c:pt idx="120">
                     <c:v>18/06</c:v>
                   </c:pt>
-                  <c:pt idx="121">
-                    <c:v/>
-                  </c:pt>
-                  <c:pt idx="122">
-                    <c:v/>
-                  </c:pt>
-                  <c:pt idx="123">
-                    <c:v/>
-                  </c:pt>
-                  <c:pt idx="124">
-                    <c:v/>
-                  </c:pt>
-                  <c:pt idx="125">
-                    <c:v/>
-                  </c:pt>
-                  <c:pt idx="126">
-                    <c:v/>
-                  </c:pt>
-                  <c:pt idx="127">
-                    <c:v/>
-                  </c:pt>
-                  <c:pt idx="128">
-                    <c:v/>
-                  </c:pt>
-                  <c:pt idx="129">
-                    <c:v/>
-                  </c:pt>
-                  <c:pt idx="130">
-                    <c:v/>
-                  </c:pt>
-                  <c:pt idx="131">
-                    <c:v/>
-                  </c:pt>
-                  <c:pt idx="132">
-                    <c:v/>
-                  </c:pt>
-                  <c:pt idx="133">
-                    <c:v/>
-                  </c:pt>
-                  <c:pt idx="134">
-                    <c:v/>
-                  </c:pt>
-                  <c:pt idx="135">
-                    <c:v/>
-                  </c:pt>
-                  <c:pt idx="136">
-                    <c:v/>
-                  </c:pt>
-                  <c:pt idx="137">
-                    <c:v/>
-                  </c:pt>
-                  <c:pt idx="138">
-                    <c:v/>
-                  </c:pt>
-                  <c:pt idx="139">
-                    <c:v/>
-                  </c:pt>
-                  <c:pt idx="140">
-                    <c:v/>
-                  </c:pt>
-                  <c:pt idx="141">
-                    <c:v/>
-                  </c:pt>
-                  <c:pt idx="142">
-                    <c:v/>
-                  </c:pt>
-                  <c:pt idx="143">
-                    <c:v/>
-                  </c:pt>
                   <c:pt idx="144">
                     <c:v>19/06</c:v>
-                  </c:pt>
-                  <c:pt idx="145">
-                    <c:v/>
-                  </c:pt>
-                  <c:pt idx="146">
-                    <c:v/>
-                  </c:pt>
-                  <c:pt idx="147">
-                    <c:v/>
-                  </c:pt>
-                  <c:pt idx="148">
-                    <c:v/>
-                  </c:pt>
-                  <c:pt idx="149">
-                    <c:v/>
-                  </c:pt>
-                  <c:pt idx="150">
-                    <c:v/>
-                  </c:pt>
-                  <c:pt idx="151">
-                    <c:v/>
-                  </c:pt>
-                  <c:pt idx="152">
-                    <c:v/>
-                  </c:pt>
-                  <c:pt idx="153">
-                    <c:v/>
-                  </c:pt>
-                  <c:pt idx="154">
-                    <c:v/>
-                  </c:pt>
-                  <c:pt idx="155">
-                    <c:v/>
-                  </c:pt>
-                  <c:pt idx="156">
-                    <c:v/>
-                  </c:pt>
-                  <c:pt idx="157">
-                    <c:v/>
-                  </c:pt>
-                  <c:pt idx="158">
-                    <c:v/>
-                  </c:pt>
-                  <c:pt idx="159">
-                    <c:v/>
-                  </c:pt>
-                  <c:pt idx="160">
-                    <c:v/>
-                  </c:pt>
-                  <c:pt idx="161">
-                    <c:v/>
-                  </c:pt>
-                  <c:pt idx="162">
-                    <c:v/>
-                  </c:pt>
-                  <c:pt idx="163">
-                    <c:v/>
-                  </c:pt>
-                  <c:pt idx="164">
-                    <c:v/>
-                  </c:pt>
-                  <c:pt idx="165">
-                    <c:v/>
-                  </c:pt>
-                  <c:pt idx="166">
-                    <c:v/>
-                  </c:pt>
-                  <c:pt idx="167">
-                    <c:v/>
                   </c:pt>
                 </c:lvl>
               </c:multiLvlStrCache>
@@ -7249,189 +6160,6 @@
               <c:numCache>
                 <c:formatCode>General</c:formatCode>
                 <c:ptCount val="168"/>
-                <c:pt idx="0">
-                  <c:v/>
-                </c:pt>
-                <c:pt idx="1">
-                  <c:v/>
-                </c:pt>
-                <c:pt idx="2">
-                  <c:v/>
-                </c:pt>
-                <c:pt idx="3">
-                  <c:v/>
-                </c:pt>
-                <c:pt idx="4">
-                  <c:v/>
-                </c:pt>
-                <c:pt idx="5">
-                  <c:v/>
-                </c:pt>
-                <c:pt idx="6">
-                  <c:v/>
-                </c:pt>
-                <c:pt idx="7">
-                  <c:v/>
-                </c:pt>
-                <c:pt idx="8">
-                  <c:v/>
-                </c:pt>
-                <c:pt idx="9">
-                  <c:v/>
-                </c:pt>
-                <c:pt idx="10">
-                  <c:v/>
-                </c:pt>
-                <c:pt idx="11">
-                  <c:v/>
-                </c:pt>
-                <c:pt idx="12">
-                  <c:v/>
-                </c:pt>
-                <c:pt idx="13">
-                  <c:v/>
-                </c:pt>
-                <c:pt idx="14">
-                  <c:v/>
-                </c:pt>
-                <c:pt idx="15">
-                  <c:v/>
-                </c:pt>
-                <c:pt idx="16">
-                  <c:v/>
-                </c:pt>
-                <c:pt idx="17">
-                  <c:v/>
-                </c:pt>
-                <c:pt idx="18">
-                  <c:v/>
-                </c:pt>
-                <c:pt idx="19">
-                  <c:v/>
-                </c:pt>
-                <c:pt idx="20">
-                  <c:v/>
-                </c:pt>
-                <c:pt idx="21">
-                  <c:v/>
-                </c:pt>
-                <c:pt idx="22">
-                  <c:v/>
-                </c:pt>
-                <c:pt idx="23">
-                  <c:v/>
-                </c:pt>
-                <c:pt idx="24">
-                  <c:v/>
-                </c:pt>
-                <c:pt idx="25">
-                  <c:v/>
-                </c:pt>
-                <c:pt idx="26">
-                  <c:v/>
-                </c:pt>
-                <c:pt idx="27">
-                  <c:v/>
-                </c:pt>
-                <c:pt idx="28">
-                  <c:v/>
-                </c:pt>
-                <c:pt idx="29">
-                  <c:v/>
-                </c:pt>
-                <c:pt idx="30">
-                  <c:v/>
-                </c:pt>
-                <c:pt idx="31">
-                  <c:v/>
-                </c:pt>
-                <c:pt idx="32">
-                  <c:v/>
-                </c:pt>
-                <c:pt idx="33">
-                  <c:v/>
-                </c:pt>
-                <c:pt idx="34">
-                  <c:v/>
-                </c:pt>
-                <c:pt idx="35">
-                  <c:v/>
-                </c:pt>
-                <c:pt idx="36">
-                  <c:v/>
-                </c:pt>
-                <c:pt idx="37">
-                  <c:v/>
-                </c:pt>
-                <c:pt idx="38">
-                  <c:v/>
-                </c:pt>
-                <c:pt idx="39">
-                  <c:v/>
-                </c:pt>
-                <c:pt idx="40">
-                  <c:v/>
-                </c:pt>
-                <c:pt idx="41">
-                  <c:v/>
-                </c:pt>
-                <c:pt idx="42">
-                  <c:v/>
-                </c:pt>
-                <c:pt idx="43">
-                  <c:v/>
-                </c:pt>
-                <c:pt idx="44">
-                  <c:v/>
-                </c:pt>
-                <c:pt idx="45">
-                  <c:v/>
-                </c:pt>
-                <c:pt idx="46">
-                  <c:v/>
-                </c:pt>
-                <c:pt idx="47">
-                  <c:v/>
-                </c:pt>
-                <c:pt idx="48">
-                  <c:v/>
-                </c:pt>
-                <c:pt idx="49">
-                  <c:v/>
-                </c:pt>
-                <c:pt idx="50">
-                  <c:v/>
-                </c:pt>
-                <c:pt idx="51">
-                  <c:v/>
-                </c:pt>
-                <c:pt idx="52">
-                  <c:v/>
-                </c:pt>
-                <c:pt idx="53">
-                  <c:v/>
-                </c:pt>
-                <c:pt idx="54">
-                  <c:v/>
-                </c:pt>
-                <c:pt idx="55">
-                  <c:v/>
-                </c:pt>
-                <c:pt idx="56">
-                  <c:v/>
-                </c:pt>
-                <c:pt idx="57">
-                  <c:v/>
-                </c:pt>
-                <c:pt idx="58">
-                  <c:v/>
-                </c:pt>
-                <c:pt idx="59">
-                  <c:v/>
-                </c:pt>
-                <c:pt idx="60">
-                  <c:v/>
-                </c:pt>
                 <c:pt idx="61">
                   <c:v>2.184</c:v>
                 </c:pt>
@@ -7456,39 +6184,6 @@
                 <c:pt idx="68">
                   <c:v>0</c:v>
                 </c:pt>
-                <c:pt idx="69">
-                  <c:v/>
-                </c:pt>
-                <c:pt idx="70">
-                  <c:v/>
-                </c:pt>
-                <c:pt idx="71">
-                  <c:v/>
-                </c:pt>
-                <c:pt idx="72">
-                  <c:v/>
-                </c:pt>
-                <c:pt idx="73">
-                  <c:v/>
-                </c:pt>
-                <c:pt idx="74">
-                  <c:v/>
-                </c:pt>
-                <c:pt idx="75">
-                  <c:v/>
-                </c:pt>
-                <c:pt idx="76">
-                  <c:v/>
-                </c:pt>
-                <c:pt idx="77">
-                  <c:v/>
-                </c:pt>
-                <c:pt idx="78">
-                  <c:v/>
-                </c:pt>
-                <c:pt idx="79">
-                  <c:v/>
-                </c:pt>
                 <c:pt idx="80">
                   <c:v>0</c:v>
                 </c:pt>
@@ -7528,39 +6223,6 @@
                 <c:pt idx="92">
                   <c:v>0</c:v>
                 </c:pt>
-                <c:pt idx="93">
-                  <c:v/>
-                </c:pt>
-                <c:pt idx="94">
-                  <c:v/>
-                </c:pt>
-                <c:pt idx="95">
-                  <c:v/>
-                </c:pt>
-                <c:pt idx="96">
-                  <c:v/>
-                </c:pt>
-                <c:pt idx="97">
-                  <c:v/>
-                </c:pt>
-                <c:pt idx="98">
-                  <c:v/>
-                </c:pt>
-                <c:pt idx="99">
-                  <c:v/>
-                </c:pt>
-                <c:pt idx="100">
-                  <c:v/>
-                </c:pt>
-                <c:pt idx="101">
-                  <c:v/>
-                </c:pt>
-                <c:pt idx="102">
-                  <c:v/>
-                </c:pt>
-                <c:pt idx="103">
-                  <c:v/>
-                </c:pt>
                 <c:pt idx="104">
                   <c:v>0</c:v>
                 </c:pt>
@@ -7599,159 +6261,6 @@
                 </c:pt>
                 <c:pt idx="116">
                   <c:v>0</c:v>
-                </c:pt>
-                <c:pt idx="117">
-                  <c:v/>
-                </c:pt>
-                <c:pt idx="118">
-                  <c:v/>
-                </c:pt>
-                <c:pt idx="119">
-                  <c:v/>
-                </c:pt>
-                <c:pt idx="120">
-                  <c:v/>
-                </c:pt>
-                <c:pt idx="121">
-                  <c:v/>
-                </c:pt>
-                <c:pt idx="122">
-                  <c:v/>
-                </c:pt>
-                <c:pt idx="123">
-                  <c:v/>
-                </c:pt>
-                <c:pt idx="124">
-                  <c:v/>
-                </c:pt>
-                <c:pt idx="125">
-                  <c:v/>
-                </c:pt>
-                <c:pt idx="126">
-                  <c:v/>
-                </c:pt>
-                <c:pt idx="127">
-                  <c:v/>
-                </c:pt>
-                <c:pt idx="128">
-                  <c:v/>
-                </c:pt>
-                <c:pt idx="129">
-                  <c:v/>
-                </c:pt>
-                <c:pt idx="130">
-                  <c:v/>
-                </c:pt>
-                <c:pt idx="131">
-                  <c:v/>
-                </c:pt>
-                <c:pt idx="132">
-                  <c:v/>
-                </c:pt>
-                <c:pt idx="133">
-                  <c:v/>
-                </c:pt>
-                <c:pt idx="134">
-                  <c:v/>
-                </c:pt>
-                <c:pt idx="135">
-                  <c:v/>
-                </c:pt>
-                <c:pt idx="136">
-                  <c:v/>
-                </c:pt>
-                <c:pt idx="137">
-                  <c:v/>
-                </c:pt>
-                <c:pt idx="138">
-                  <c:v/>
-                </c:pt>
-                <c:pt idx="139">
-                  <c:v/>
-                </c:pt>
-                <c:pt idx="140">
-                  <c:v/>
-                </c:pt>
-                <c:pt idx="141">
-                  <c:v/>
-                </c:pt>
-                <c:pt idx="142">
-                  <c:v/>
-                </c:pt>
-                <c:pt idx="143">
-                  <c:v/>
-                </c:pt>
-                <c:pt idx="144">
-                  <c:v/>
-                </c:pt>
-                <c:pt idx="145">
-                  <c:v/>
-                </c:pt>
-                <c:pt idx="146">
-                  <c:v/>
-                </c:pt>
-                <c:pt idx="147">
-                  <c:v/>
-                </c:pt>
-                <c:pt idx="148">
-                  <c:v/>
-                </c:pt>
-                <c:pt idx="149">
-                  <c:v/>
-                </c:pt>
-                <c:pt idx="150">
-                  <c:v/>
-                </c:pt>
-                <c:pt idx="151">
-                  <c:v/>
-                </c:pt>
-                <c:pt idx="152">
-                  <c:v/>
-                </c:pt>
-                <c:pt idx="153">
-                  <c:v/>
-                </c:pt>
-                <c:pt idx="154">
-                  <c:v/>
-                </c:pt>
-                <c:pt idx="155">
-                  <c:v/>
-                </c:pt>
-                <c:pt idx="156">
-                  <c:v/>
-                </c:pt>
-                <c:pt idx="157">
-                  <c:v/>
-                </c:pt>
-                <c:pt idx="158">
-                  <c:v/>
-                </c:pt>
-                <c:pt idx="159">
-                  <c:v/>
-                </c:pt>
-                <c:pt idx="160">
-                  <c:v/>
-                </c:pt>
-                <c:pt idx="161">
-                  <c:v/>
-                </c:pt>
-                <c:pt idx="162">
-                  <c:v/>
-                </c:pt>
-                <c:pt idx="163">
-                  <c:v/>
-                </c:pt>
-                <c:pt idx="164">
-                  <c:v/>
-                </c:pt>
-                <c:pt idx="165">
-                  <c:v/>
-                </c:pt>
-                <c:pt idx="166">
-                  <c:v/>
-                </c:pt>
-                <c:pt idx="167">
-                  <c:v/>
                 </c:pt>
               </c:numCache>
             </c:numRef>
@@ -7965,7 +6474,7 @@
               <a:solidFill>
                 <a:srgbClr val="E89B0C"/>
               </a:solidFill>
-              <a:prstDash val="solid,dash"/>
+              <a:prstDash val="solid"/>
               <a:round/>
             </a:ln>
             <a:effectLst/>
@@ -8021,506 +6530,23 @@
                   <c:pt idx="0">
                     <c:v>15/03</c:v>
                   </c:pt>
-                  <c:pt idx="1">
-                    <c:v/>
-                  </c:pt>
-                  <c:pt idx="2">
-                    <c:v/>
-                  </c:pt>
-                  <c:pt idx="3">
-                    <c:v/>
-                  </c:pt>
-                  <c:pt idx="4">
-                    <c:v/>
-                  </c:pt>
-                  <c:pt idx="5">
-                    <c:v/>
-                  </c:pt>
-                  <c:pt idx="6">
-                    <c:v/>
-                  </c:pt>
-                  <c:pt idx="7">
-                    <c:v/>
-                  </c:pt>
-                  <c:pt idx="8">
-                    <c:v/>
-                  </c:pt>
-                  <c:pt idx="9">
-                    <c:v/>
-                  </c:pt>
-                  <c:pt idx="10">
-                    <c:v/>
-                  </c:pt>
-                  <c:pt idx="11">
-                    <c:v/>
-                  </c:pt>
-                  <c:pt idx="12">
-                    <c:v/>
-                  </c:pt>
-                  <c:pt idx="13">
-                    <c:v/>
-                  </c:pt>
-                  <c:pt idx="14">
-                    <c:v/>
-                  </c:pt>
-                  <c:pt idx="15">
-                    <c:v/>
-                  </c:pt>
-                  <c:pt idx="16">
-                    <c:v/>
-                  </c:pt>
-                  <c:pt idx="17">
-                    <c:v/>
-                  </c:pt>
-                  <c:pt idx="18">
-                    <c:v/>
-                  </c:pt>
-                  <c:pt idx="19">
-                    <c:v/>
-                  </c:pt>
-                  <c:pt idx="20">
-                    <c:v/>
-                  </c:pt>
-                  <c:pt idx="21">
-                    <c:v/>
-                  </c:pt>
-                  <c:pt idx="22">
-                    <c:v/>
-                  </c:pt>
-                  <c:pt idx="23">
-                    <c:v/>
-                  </c:pt>
                   <c:pt idx="24">
                     <c:v>16/03</c:v>
                   </c:pt>
-                  <c:pt idx="25">
-                    <c:v/>
-                  </c:pt>
-                  <c:pt idx="26">
-                    <c:v/>
-                  </c:pt>
-                  <c:pt idx="27">
-                    <c:v/>
-                  </c:pt>
-                  <c:pt idx="28">
-                    <c:v/>
-                  </c:pt>
-                  <c:pt idx="29">
-                    <c:v/>
-                  </c:pt>
-                  <c:pt idx="30">
-                    <c:v/>
-                  </c:pt>
-                  <c:pt idx="31">
-                    <c:v/>
-                  </c:pt>
-                  <c:pt idx="32">
-                    <c:v/>
-                  </c:pt>
-                  <c:pt idx="33">
-                    <c:v/>
-                  </c:pt>
-                  <c:pt idx="34">
-                    <c:v/>
-                  </c:pt>
-                  <c:pt idx="35">
-                    <c:v/>
-                  </c:pt>
-                  <c:pt idx="36">
-                    <c:v/>
-                  </c:pt>
-                  <c:pt idx="37">
-                    <c:v/>
-                  </c:pt>
-                  <c:pt idx="38">
-                    <c:v/>
-                  </c:pt>
-                  <c:pt idx="39">
-                    <c:v/>
-                  </c:pt>
-                  <c:pt idx="40">
-                    <c:v/>
-                  </c:pt>
-                  <c:pt idx="41">
-                    <c:v/>
-                  </c:pt>
-                  <c:pt idx="42">
-                    <c:v/>
-                  </c:pt>
-                  <c:pt idx="43">
-                    <c:v/>
-                  </c:pt>
-                  <c:pt idx="44">
-                    <c:v/>
-                  </c:pt>
-                  <c:pt idx="45">
-                    <c:v/>
-                  </c:pt>
-                  <c:pt idx="46">
-                    <c:v/>
-                  </c:pt>
-                  <c:pt idx="47">
-                    <c:v/>
-                  </c:pt>
                   <c:pt idx="48">
                     <c:v>17/03</c:v>
                   </c:pt>
-                  <c:pt idx="49">
-                    <c:v/>
-                  </c:pt>
-                  <c:pt idx="50">
-                    <c:v/>
-                  </c:pt>
-                  <c:pt idx="51">
-                    <c:v/>
-                  </c:pt>
-                  <c:pt idx="52">
-                    <c:v/>
-                  </c:pt>
-                  <c:pt idx="53">
-                    <c:v/>
-                  </c:pt>
-                  <c:pt idx="54">
-                    <c:v/>
-                  </c:pt>
-                  <c:pt idx="55">
-                    <c:v/>
-                  </c:pt>
-                  <c:pt idx="56">
-                    <c:v/>
-                  </c:pt>
-                  <c:pt idx="57">
-                    <c:v/>
-                  </c:pt>
-                  <c:pt idx="58">
-                    <c:v/>
-                  </c:pt>
-                  <c:pt idx="59">
-                    <c:v/>
-                  </c:pt>
-                  <c:pt idx="60">
-                    <c:v/>
-                  </c:pt>
-                  <c:pt idx="61">
-                    <c:v/>
-                  </c:pt>
-                  <c:pt idx="62">
-                    <c:v/>
-                  </c:pt>
-                  <c:pt idx="63">
-                    <c:v/>
-                  </c:pt>
-                  <c:pt idx="64">
-                    <c:v/>
-                  </c:pt>
-                  <c:pt idx="65">
-                    <c:v/>
-                  </c:pt>
-                  <c:pt idx="66">
-                    <c:v/>
-                  </c:pt>
-                  <c:pt idx="67">
-                    <c:v/>
-                  </c:pt>
-                  <c:pt idx="68">
-                    <c:v/>
-                  </c:pt>
-                  <c:pt idx="69">
-                    <c:v/>
-                  </c:pt>
-                  <c:pt idx="70">
-                    <c:v/>
-                  </c:pt>
-                  <c:pt idx="71">
-                    <c:v/>
-                  </c:pt>
                   <c:pt idx="72">
                     <c:v>18/03</c:v>
                   </c:pt>
-                  <c:pt idx="73">
-                    <c:v/>
-                  </c:pt>
-                  <c:pt idx="74">
-                    <c:v/>
-                  </c:pt>
-                  <c:pt idx="75">
-                    <c:v/>
-                  </c:pt>
-                  <c:pt idx="76">
-                    <c:v/>
-                  </c:pt>
-                  <c:pt idx="77">
-                    <c:v/>
-                  </c:pt>
-                  <c:pt idx="78">
-                    <c:v/>
-                  </c:pt>
-                  <c:pt idx="79">
-                    <c:v/>
-                  </c:pt>
-                  <c:pt idx="80">
-                    <c:v/>
-                  </c:pt>
-                  <c:pt idx="81">
-                    <c:v/>
-                  </c:pt>
-                  <c:pt idx="82">
-                    <c:v/>
-                  </c:pt>
-                  <c:pt idx="83">
-                    <c:v/>
-                  </c:pt>
-                  <c:pt idx="84">
-                    <c:v/>
-                  </c:pt>
-                  <c:pt idx="85">
-                    <c:v/>
-                  </c:pt>
-                  <c:pt idx="86">
-                    <c:v/>
-                  </c:pt>
-                  <c:pt idx="87">
-                    <c:v/>
-                  </c:pt>
-                  <c:pt idx="88">
-                    <c:v/>
-                  </c:pt>
-                  <c:pt idx="89">
-                    <c:v/>
-                  </c:pt>
-                  <c:pt idx="90">
-                    <c:v/>
-                  </c:pt>
-                  <c:pt idx="91">
-                    <c:v/>
-                  </c:pt>
-                  <c:pt idx="92">
-                    <c:v/>
-                  </c:pt>
-                  <c:pt idx="93">
-                    <c:v/>
-                  </c:pt>
-                  <c:pt idx="94">
-                    <c:v/>
-                  </c:pt>
-                  <c:pt idx="95">
-                    <c:v/>
-                  </c:pt>
                   <c:pt idx="96">
                     <c:v>19/03</c:v>
                   </c:pt>
-                  <c:pt idx="97">
-                    <c:v/>
-                  </c:pt>
-                  <c:pt idx="98">
-                    <c:v/>
-                  </c:pt>
-                  <c:pt idx="99">
-                    <c:v/>
-                  </c:pt>
-                  <c:pt idx="100">
-                    <c:v/>
-                  </c:pt>
-                  <c:pt idx="101">
-                    <c:v/>
-                  </c:pt>
-                  <c:pt idx="102">
-                    <c:v/>
-                  </c:pt>
-                  <c:pt idx="103">
-                    <c:v/>
-                  </c:pt>
-                  <c:pt idx="104">
-                    <c:v/>
-                  </c:pt>
-                  <c:pt idx="105">
-                    <c:v/>
-                  </c:pt>
-                  <c:pt idx="106">
-                    <c:v/>
-                  </c:pt>
-                  <c:pt idx="107">
-                    <c:v/>
-                  </c:pt>
-                  <c:pt idx="108">
-                    <c:v/>
-                  </c:pt>
-                  <c:pt idx="109">
-                    <c:v/>
-                  </c:pt>
-                  <c:pt idx="110">
-                    <c:v/>
-                  </c:pt>
-                  <c:pt idx="111">
-                    <c:v/>
-                  </c:pt>
-                  <c:pt idx="112">
-                    <c:v/>
-                  </c:pt>
-                  <c:pt idx="113">
-                    <c:v/>
-                  </c:pt>
-                  <c:pt idx="114">
-                    <c:v/>
-                  </c:pt>
-                  <c:pt idx="115">
-                    <c:v/>
-                  </c:pt>
-                  <c:pt idx="116">
-                    <c:v/>
-                  </c:pt>
-                  <c:pt idx="117">
-                    <c:v/>
-                  </c:pt>
-                  <c:pt idx="118">
-                    <c:v/>
-                  </c:pt>
-                  <c:pt idx="119">
-                    <c:v/>
-                  </c:pt>
                   <c:pt idx="120">
                     <c:v>20/03</c:v>
                   </c:pt>
-                  <c:pt idx="121">
-                    <c:v/>
-                  </c:pt>
-                  <c:pt idx="122">
-                    <c:v/>
-                  </c:pt>
-                  <c:pt idx="123">
-                    <c:v/>
-                  </c:pt>
-                  <c:pt idx="124">
-                    <c:v/>
-                  </c:pt>
-                  <c:pt idx="125">
-                    <c:v/>
-                  </c:pt>
-                  <c:pt idx="126">
-                    <c:v/>
-                  </c:pt>
-                  <c:pt idx="127">
-                    <c:v/>
-                  </c:pt>
-                  <c:pt idx="128">
-                    <c:v/>
-                  </c:pt>
-                  <c:pt idx="129">
-                    <c:v/>
-                  </c:pt>
-                  <c:pt idx="130">
-                    <c:v/>
-                  </c:pt>
-                  <c:pt idx="131">
-                    <c:v/>
-                  </c:pt>
-                  <c:pt idx="132">
-                    <c:v/>
-                  </c:pt>
-                  <c:pt idx="133">
-                    <c:v/>
-                  </c:pt>
-                  <c:pt idx="134">
-                    <c:v/>
-                  </c:pt>
-                  <c:pt idx="135">
-                    <c:v/>
-                  </c:pt>
-                  <c:pt idx="136">
-                    <c:v/>
-                  </c:pt>
-                  <c:pt idx="137">
-                    <c:v/>
-                  </c:pt>
-                  <c:pt idx="138">
-                    <c:v/>
-                  </c:pt>
-                  <c:pt idx="139">
-                    <c:v/>
-                  </c:pt>
-                  <c:pt idx="140">
-                    <c:v/>
-                  </c:pt>
-                  <c:pt idx="141">
-                    <c:v/>
-                  </c:pt>
-                  <c:pt idx="142">
-                    <c:v/>
-                  </c:pt>
-                  <c:pt idx="143">
-                    <c:v/>
-                  </c:pt>
                   <c:pt idx="144">
                     <c:v>21/03</c:v>
-                  </c:pt>
-                  <c:pt idx="145">
-                    <c:v/>
-                  </c:pt>
-                  <c:pt idx="146">
-                    <c:v/>
-                  </c:pt>
-                  <c:pt idx="147">
-                    <c:v/>
-                  </c:pt>
-                  <c:pt idx="148">
-                    <c:v/>
-                  </c:pt>
-                  <c:pt idx="149">
-                    <c:v/>
-                  </c:pt>
-                  <c:pt idx="150">
-                    <c:v/>
-                  </c:pt>
-                  <c:pt idx="151">
-                    <c:v/>
-                  </c:pt>
-                  <c:pt idx="152">
-                    <c:v/>
-                  </c:pt>
-                  <c:pt idx="153">
-                    <c:v/>
-                  </c:pt>
-                  <c:pt idx="154">
-                    <c:v/>
-                  </c:pt>
-                  <c:pt idx="155">
-                    <c:v/>
-                  </c:pt>
-                  <c:pt idx="156">
-                    <c:v/>
-                  </c:pt>
-                  <c:pt idx="157">
-                    <c:v/>
-                  </c:pt>
-                  <c:pt idx="158">
-                    <c:v/>
-                  </c:pt>
-                  <c:pt idx="159">
-                    <c:v/>
-                  </c:pt>
-                  <c:pt idx="160">
-                    <c:v/>
-                  </c:pt>
-                  <c:pt idx="161">
-                    <c:v/>
-                  </c:pt>
-                  <c:pt idx="162">
-                    <c:v/>
-                  </c:pt>
-                  <c:pt idx="163">
-                    <c:v/>
-                  </c:pt>
-                  <c:pt idx="164">
-                    <c:v/>
-                  </c:pt>
-                  <c:pt idx="165">
-                    <c:v/>
-                  </c:pt>
-                  <c:pt idx="166">
-                    <c:v/>
-                  </c:pt>
-                  <c:pt idx="167">
-                    <c:v/>
                   </c:pt>
                 </c:lvl>
               </c:multiLvlStrCache>
@@ -9063,7 +7089,7 @@
               <a:solidFill>
                 <a:srgbClr val="2A9D8F"/>
               </a:solidFill>
-              <a:prstDash val="solid,dash"/>
+              <a:prstDash val="dash"/>
               <a:round/>
             </a:ln>
             <a:effectLst/>
@@ -9119,506 +7145,23 @@
                   <c:pt idx="0">
                     <c:v>15/03</c:v>
                   </c:pt>
-                  <c:pt idx="1">
-                    <c:v/>
-                  </c:pt>
-                  <c:pt idx="2">
-                    <c:v/>
-                  </c:pt>
-                  <c:pt idx="3">
-                    <c:v/>
-                  </c:pt>
-                  <c:pt idx="4">
-                    <c:v/>
-                  </c:pt>
-                  <c:pt idx="5">
-                    <c:v/>
-                  </c:pt>
-                  <c:pt idx="6">
-                    <c:v/>
-                  </c:pt>
-                  <c:pt idx="7">
-                    <c:v/>
-                  </c:pt>
-                  <c:pt idx="8">
-                    <c:v/>
-                  </c:pt>
-                  <c:pt idx="9">
-                    <c:v/>
-                  </c:pt>
-                  <c:pt idx="10">
-                    <c:v/>
-                  </c:pt>
-                  <c:pt idx="11">
-                    <c:v/>
-                  </c:pt>
-                  <c:pt idx="12">
-                    <c:v/>
-                  </c:pt>
-                  <c:pt idx="13">
-                    <c:v/>
-                  </c:pt>
-                  <c:pt idx="14">
-                    <c:v/>
-                  </c:pt>
-                  <c:pt idx="15">
-                    <c:v/>
-                  </c:pt>
-                  <c:pt idx="16">
-                    <c:v/>
-                  </c:pt>
-                  <c:pt idx="17">
-                    <c:v/>
-                  </c:pt>
-                  <c:pt idx="18">
-                    <c:v/>
-                  </c:pt>
-                  <c:pt idx="19">
-                    <c:v/>
-                  </c:pt>
-                  <c:pt idx="20">
-                    <c:v/>
-                  </c:pt>
-                  <c:pt idx="21">
-                    <c:v/>
-                  </c:pt>
-                  <c:pt idx="22">
-                    <c:v/>
-                  </c:pt>
-                  <c:pt idx="23">
-                    <c:v/>
-                  </c:pt>
                   <c:pt idx="24">
                     <c:v>16/03</c:v>
                   </c:pt>
-                  <c:pt idx="25">
-                    <c:v/>
-                  </c:pt>
-                  <c:pt idx="26">
-                    <c:v/>
-                  </c:pt>
-                  <c:pt idx="27">
-                    <c:v/>
-                  </c:pt>
-                  <c:pt idx="28">
-                    <c:v/>
-                  </c:pt>
-                  <c:pt idx="29">
-                    <c:v/>
-                  </c:pt>
-                  <c:pt idx="30">
-                    <c:v/>
-                  </c:pt>
-                  <c:pt idx="31">
-                    <c:v/>
-                  </c:pt>
-                  <c:pt idx="32">
-                    <c:v/>
-                  </c:pt>
-                  <c:pt idx="33">
-                    <c:v/>
-                  </c:pt>
-                  <c:pt idx="34">
-                    <c:v/>
-                  </c:pt>
-                  <c:pt idx="35">
-                    <c:v/>
-                  </c:pt>
-                  <c:pt idx="36">
-                    <c:v/>
-                  </c:pt>
-                  <c:pt idx="37">
-                    <c:v/>
-                  </c:pt>
-                  <c:pt idx="38">
-                    <c:v/>
-                  </c:pt>
-                  <c:pt idx="39">
-                    <c:v/>
-                  </c:pt>
-                  <c:pt idx="40">
-                    <c:v/>
-                  </c:pt>
-                  <c:pt idx="41">
-                    <c:v/>
-                  </c:pt>
-                  <c:pt idx="42">
-                    <c:v/>
-                  </c:pt>
-                  <c:pt idx="43">
-                    <c:v/>
-                  </c:pt>
-                  <c:pt idx="44">
-                    <c:v/>
-                  </c:pt>
-                  <c:pt idx="45">
-                    <c:v/>
-                  </c:pt>
-                  <c:pt idx="46">
-                    <c:v/>
-                  </c:pt>
-                  <c:pt idx="47">
-                    <c:v/>
-                  </c:pt>
                   <c:pt idx="48">
                     <c:v>17/03</c:v>
                   </c:pt>
-                  <c:pt idx="49">
-                    <c:v/>
-                  </c:pt>
-                  <c:pt idx="50">
-                    <c:v/>
-                  </c:pt>
-                  <c:pt idx="51">
-                    <c:v/>
-                  </c:pt>
-                  <c:pt idx="52">
-                    <c:v/>
-                  </c:pt>
-                  <c:pt idx="53">
-                    <c:v/>
-                  </c:pt>
-                  <c:pt idx="54">
-                    <c:v/>
-                  </c:pt>
-                  <c:pt idx="55">
-                    <c:v/>
-                  </c:pt>
-                  <c:pt idx="56">
-                    <c:v/>
-                  </c:pt>
-                  <c:pt idx="57">
-                    <c:v/>
-                  </c:pt>
-                  <c:pt idx="58">
-                    <c:v/>
-                  </c:pt>
-                  <c:pt idx="59">
-                    <c:v/>
-                  </c:pt>
-                  <c:pt idx="60">
-                    <c:v/>
-                  </c:pt>
-                  <c:pt idx="61">
-                    <c:v/>
-                  </c:pt>
-                  <c:pt idx="62">
-                    <c:v/>
-                  </c:pt>
-                  <c:pt idx="63">
-                    <c:v/>
-                  </c:pt>
-                  <c:pt idx="64">
-                    <c:v/>
-                  </c:pt>
-                  <c:pt idx="65">
-                    <c:v/>
-                  </c:pt>
-                  <c:pt idx="66">
-                    <c:v/>
-                  </c:pt>
-                  <c:pt idx="67">
-                    <c:v/>
-                  </c:pt>
-                  <c:pt idx="68">
-                    <c:v/>
-                  </c:pt>
-                  <c:pt idx="69">
-                    <c:v/>
-                  </c:pt>
-                  <c:pt idx="70">
-                    <c:v/>
-                  </c:pt>
-                  <c:pt idx="71">
-                    <c:v/>
-                  </c:pt>
                   <c:pt idx="72">
                     <c:v>18/03</c:v>
                   </c:pt>
-                  <c:pt idx="73">
-                    <c:v/>
-                  </c:pt>
-                  <c:pt idx="74">
-                    <c:v/>
-                  </c:pt>
-                  <c:pt idx="75">
-                    <c:v/>
-                  </c:pt>
-                  <c:pt idx="76">
-                    <c:v/>
-                  </c:pt>
-                  <c:pt idx="77">
-                    <c:v/>
-                  </c:pt>
-                  <c:pt idx="78">
-                    <c:v/>
-                  </c:pt>
-                  <c:pt idx="79">
-                    <c:v/>
-                  </c:pt>
-                  <c:pt idx="80">
-                    <c:v/>
-                  </c:pt>
-                  <c:pt idx="81">
-                    <c:v/>
-                  </c:pt>
-                  <c:pt idx="82">
-                    <c:v/>
-                  </c:pt>
-                  <c:pt idx="83">
-                    <c:v/>
-                  </c:pt>
-                  <c:pt idx="84">
-                    <c:v/>
-                  </c:pt>
-                  <c:pt idx="85">
-                    <c:v/>
-                  </c:pt>
-                  <c:pt idx="86">
-                    <c:v/>
-                  </c:pt>
-                  <c:pt idx="87">
-                    <c:v/>
-                  </c:pt>
-                  <c:pt idx="88">
-                    <c:v/>
-                  </c:pt>
-                  <c:pt idx="89">
-                    <c:v/>
-                  </c:pt>
-                  <c:pt idx="90">
-                    <c:v/>
-                  </c:pt>
-                  <c:pt idx="91">
-                    <c:v/>
-                  </c:pt>
-                  <c:pt idx="92">
-                    <c:v/>
-                  </c:pt>
-                  <c:pt idx="93">
-                    <c:v/>
-                  </c:pt>
-                  <c:pt idx="94">
-                    <c:v/>
-                  </c:pt>
-                  <c:pt idx="95">
-                    <c:v/>
-                  </c:pt>
                   <c:pt idx="96">
                     <c:v>19/03</c:v>
                   </c:pt>
-                  <c:pt idx="97">
-                    <c:v/>
-                  </c:pt>
-                  <c:pt idx="98">
-                    <c:v/>
-                  </c:pt>
-                  <c:pt idx="99">
-                    <c:v/>
-                  </c:pt>
-                  <c:pt idx="100">
-                    <c:v/>
-                  </c:pt>
-                  <c:pt idx="101">
-                    <c:v/>
-                  </c:pt>
-                  <c:pt idx="102">
-                    <c:v/>
-                  </c:pt>
-                  <c:pt idx="103">
-                    <c:v/>
-                  </c:pt>
-                  <c:pt idx="104">
-                    <c:v/>
-                  </c:pt>
-                  <c:pt idx="105">
-                    <c:v/>
-                  </c:pt>
-                  <c:pt idx="106">
-                    <c:v/>
-                  </c:pt>
-                  <c:pt idx="107">
-                    <c:v/>
-                  </c:pt>
-                  <c:pt idx="108">
-                    <c:v/>
-                  </c:pt>
-                  <c:pt idx="109">
-                    <c:v/>
-                  </c:pt>
-                  <c:pt idx="110">
-                    <c:v/>
-                  </c:pt>
-                  <c:pt idx="111">
-                    <c:v/>
-                  </c:pt>
-                  <c:pt idx="112">
-                    <c:v/>
-                  </c:pt>
-                  <c:pt idx="113">
-                    <c:v/>
-                  </c:pt>
-                  <c:pt idx="114">
-                    <c:v/>
-                  </c:pt>
-                  <c:pt idx="115">
-                    <c:v/>
-                  </c:pt>
-                  <c:pt idx="116">
-                    <c:v/>
-                  </c:pt>
-                  <c:pt idx="117">
-                    <c:v/>
-                  </c:pt>
-                  <c:pt idx="118">
-                    <c:v/>
-                  </c:pt>
-                  <c:pt idx="119">
-                    <c:v/>
-                  </c:pt>
                   <c:pt idx="120">
                     <c:v>20/03</c:v>
                   </c:pt>
-                  <c:pt idx="121">
-                    <c:v/>
-                  </c:pt>
-                  <c:pt idx="122">
-                    <c:v/>
-                  </c:pt>
-                  <c:pt idx="123">
-                    <c:v/>
-                  </c:pt>
-                  <c:pt idx="124">
-                    <c:v/>
-                  </c:pt>
-                  <c:pt idx="125">
-                    <c:v/>
-                  </c:pt>
-                  <c:pt idx="126">
-                    <c:v/>
-                  </c:pt>
-                  <c:pt idx="127">
-                    <c:v/>
-                  </c:pt>
-                  <c:pt idx="128">
-                    <c:v/>
-                  </c:pt>
-                  <c:pt idx="129">
-                    <c:v/>
-                  </c:pt>
-                  <c:pt idx="130">
-                    <c:v/>
-                  </c:pt>
-                  <c:pt idx="131">
-                    <c:v/>
-                  </c:pt>
-                  <c:pt idx="132">
-                    <c:v/>
-                  </c:pt>
-                  <c:pt idx="133">
-                    <c:v/>
-                  </c:pt>
-                  <c:pt idx="134">
-                    <c:v/>
-                  </c:pt>
-                  <c:pt idx="135">
-                    <c:v/>
-                  </c:pt>
-                  <c:pt idx="136">
-                    <c:v/>
-                  </c:pt>
-                  <c:pt idx="137">
-                    <c:v/>
-                  </c:pt>
-                  <c:pt idx="138">
-                    <c:v/>
-                  </c:pt>
-                  <c:pt idx="139">
-                    <c:v/>
-                  </c:pt>
-                  <c:pt idx="140">
-                    <c:v/>
-                  </c:pt>
-                  <c:pt idx="141">
-                    <c:v/>
-                  </c:pt>
-                  <c:pt idx="142">
-                    <c:v/>
-                  </c:pt>
-                  <c:pt idx="143">
-                    <c:v/>
-                  </c:pt>
                   <c:pt idx="144">
                     <c:v>21/03</c:v>
-                  </c:pt>
-                  <c:pt idx="145">
-                    <c:v/>
-                  </c:pt>
-                  <c:pt idx="146">
-                    <c:v/>
-                  </c:pt>
-                  <c:pt idx="147">
-                    <c:v/>
-                  </c:pt>
-                  <c:pt idx="148">
-                    <c:v/>
-                  </c:pt>
-                  <c:pt idx="149">
-                    <c:v/>
-                  </c:pt>
-                  <c:pt idx="150">
-                    <c:v/>
-                  </c:pt>
-                  <c:pt idx="151">
-                    <c:v/>
-                  </c:pt>
-                  <c:pt idx="152">
-                    <c:v/>
-                  </c:pt>
-                  <c:pt idx="153">
-                    <c:v/>
-                  </c:pt>
-                  <c:pt idx="154">
-                    <c:v/>
-                  </c:pt>
-                  <c:pt idx="155">
-                    <c:v/>
-                  </c:pt>
-                  <c:pt idx="156">
-                    <c:v/>
-                  </c:pt>
-                  <c:pt idx="157">
-                    <c:v/>
-                  </c:pt>
-                  <c:pt idx="158">
-                    <c:v/>
-                  </c:pt>
-                  <c:pt idx="159">
-                    <c:v/>
-                  </c:pt>
-                  <c:pt idx="160">
-                    <c:v/>
-                  </c:pt>
-                  <c:pt idx="161">
-                    <c:v/>
-                  </c:pt>
-                  <c:pt idx="162">
-                    <c:v/>
-                  </c:pt>
-                  <c:pt idx="163">
-                    <c:v/>
-                  </c:pt>
-                  <c:pt idx="164">
-                    <c:v/>
-                  </c:pt>
-                  <c:pt idx="165">
-                    <c:v/>
-                  </c:pt>
-                  <c:pt idx="166">
-                    <c:v/>
-                  </c:pt>
-                  <c:pt idx="167">
-                    <c:v/>
                   </c:pt>
                 </c:lvl>
               </c:multiLvlStrCache>
@@ -15791,45 +13334,6 @@
                 <c:pt idx="460">
                   <c:v>2.457</c:v>
                 </c:pt>
-                <c:pt idx="461">
-                  <c:v/>
-                </c:pt>
-                <c:pt idx="462">
-                  <c:v/>
-                </c:pt>
-                <c:pt idx="463">
-                  <c:v/>
-                </c:pt>
-                <c:pt idx="464">
-                  <c:v/>
-                </c:pt>
-                <c:pt idx="465">
-                  <c:v/>
-                </c:pt>
-                <c:pt idx="466">
-                  <c:v/>
-                </c:pt>
-                <c:pt idx="467">
-                  <c:v/>
-                </c:pt>
-                <c:pt idx="468">
-                  <c:v/>
-                </c:pt>
-                <c:pt idx="469">
-                  <c:v/>
-                </c:pt>
-                <c:pt idx="470">
-                  <c:v/>
-                </c:pt>
-                <c:pt idx="471">
-                  <c:v/>
-                </c:pt>
-                <c:pt idx="472">
-                  <c:v/>
-                </c:pt>
-                <c:pt idx="473">
-                  <c:v/>
-                </c:pt>
                 <c:pt idx="474">
                   <c:v>2.106</c:v>
                 </c:pt>
@@ -16981,9 +14485,6 @@
                 </c:pt>
                 <c:pt idx="857">
                   <c:v>0</c:v>
-                </c:pt>
-                <c:pt idx="858">
-                  <c:v/>
                 </c:pt>
                 <c:pt idx="859">
                   <c:v>0</c:v>
@@ -21801,7 +19302,7 @@
               <a:solidFill>
                 <a:srgbClr val="A0AEC0"/>
               </a:solidFill>
-              <a:prstDash val="dash,solid"/>
+              <a:prstDash val="solid"/>
               <a:round/>
             </a:ln>
             <a:effectLst/>
@@ -22467,7 +19968,7 @@
               <a:solidFill>
                 <a:srgbClr val="2A9D8F"/>
               </a:solidFill>
-              <a:prstDash val="dash,solid"/>
+              <a:prstDash val="dash"/>
               <a:round/>
             </a:ln>
             <a:effectLst/>
@@ -31329,2594 +28830,11 @@
                   <c:pt idx="0">
                     <c:v>21/02</c:v>
                   </c:pt>
-                  <c:pt idx="1">
-                    <c:v/>
-                  </c:pt>
-                  <c:pt idx="2">
-                    <c:v/>
-                  </c:pt>
-                  <c:pt idx="3">
-                    <c:v/>
-                  </c:pt>
-                  <c:pt idx="4">
-                    <c:v/>
-                  </c:pt>
-                  <c:pt idx="5">
-                    <c:v/>
-                  </c:pt>
-                  <c:pt idx="6">
-                    <c:v/>
-                  </c:pt>
-                  <c:pt idx="7">
-                    <c:v/>
-                  </c:pt>
-                  <c:pt idx="8">
-                    <c:v/>
-                  </c:pt>
-                  <c:pt idx="9">
-                    <c:v/>
-                  </c:pt>
-                  <c:pt idx="10">
-                    <c:v/>
-                  </c:pt>
-                  <c:pt idx="11">
-                    <c:v/>
-                  </c:pt>
-                  <c:pt idx="12">
-                    <c:v/>
-                  </c:pt>
-                  <c:pt idx="13">
-                    <c:v/>
-                  </c:pt>
-                  <c:pt idx="14">
-                    <c:v/>
-                  </c:pt>
-                  <c:pt idx="15">
-                    <c:v/>
-                  </c:pt>
-                  <c:pt idx="16">
-                    <c:v/>
-                  </c:pt>
-                  <c:pt idx="17">
-                    <c:v/>
-                  </c:pt>
-                  <c:pt idx="18">
-                    <c:v/>
-                  </c:pt>
-                  <c:pt idx="19">
-                    <c:v/>
-                  </c:pt>
-                  <c:pt idx="20">
-                    <c:v/>
-                  </c:pt>
-                  <c:pt idx="21">
-                    <c:v/>
-                  </c:pt>
-                  <c:pt idx="22">
-                    <c:v/>
-                  </c:pt>
-                  <c:pt idx="23">
-                    <c:v/>
-                  </c:pt>
-                  <c:pt idx="24">
-                    <c:v/>
-                  </c:pt>
-                  <c:pt idx="25">
-                    <c:v/>
-                  </c:pt>
-                  <c:pt idx="26">
-                    <c:v/>
-                  </c:pt>
-                  <c:pt idx="27">
-                    <c:v/>
-                  </c:pt>
-                  <c:pt idx="28">
-                    <c:v/>
-                  </c:pt>
-                  <c:pt idx="29">
-                    <c:v/>
-                  </c:pt>
-                  <c:pt idx="30">
-                    <c:v/>
-                  </c:pt>
-                  <c:pt idx="31">
-                    <c:v/>
-                  </c:pt>
-                  <c:pt idx="32">
-                    <c:v/>
-                  </c:pt>
-                  <c:pt idx="33">
-                    <c:v/>
-                  </c:pt>
-                  <c:pt idx="34">
-                    <c:v/>
-                  </c:pt>
-                  <c:pt idx="35">
-                    <c:v/>
-                  </c:pt>
-                  <c:pt idx="36">
-                    <c:v/>
-                  </c:pt>
-                  <c:pt idx="37">
-                    <c:v/>
-                  </c:pt>
-                  <c:pt idx="38">
-                    <c:v/>
-                  </c:pt>
-                  <c:pt idx="39">
-                    <c:v/>
-                  </c:pt>
-                  <c:pt idx="40">
-                    <c:v/>
-                  </c:pt>
-                  <c:pt idx="41">
-                    <c:v/>
-                  </c:pt>
-                  <c:pt idx="42">
-                    <c:v/>
-                  </c:pt>
-                  <c:pt idx="43">
-                    <c:v/>
-                  </c:pt>
-                  <c:pt idx="44">
-                    <c:v/>
-                  </c:pt>
-                  <c:pt idx="45">
-                    <c:v/>
-                  </c:pt>
-                  <c:pt idx="46">
-                    <c:v/>
-                  </c:pt>
-                  <c:pt idx="47">
-                    <c:v/>
-                  </c:pt>
-                  <c:pt idx="48">
-                    <c:v/>
-                  </c:pt>
-                  <c:pt idx="49">
-                    <c:v/>
-                  </c:pt>
-                  <c:pt idx="50">
-                    <c:v/>
-                  </c:pt>
-                  <c:pt idx="51">
-                    <c:v/>
-                  </c:pt>
-                  <c:pt idx="52">
-                    <c:v/>
-                  </c:pt>
-                  <c:pt idx="53">
-                    <c:v/>
-                  </c:pt>
-                  <c:pt idx="54">
-                    <c:v/>
-                  </c:pt>
-                  <c:pt idx="55">
-                    <c:v/>
-                  </c:pt>
-                  <c:pt idx="56">
-                    <c:v/>
-                  </c:pt>
-                  <c:pt idx="57">
-                    <c:v/>
-                  </c:pt>
-                  <c:pt idx="58">
-                    <c:v/>
-                  </c:pt>
-                  <c:pt idx="59">
-                    <c:v/>
-                  </c:pt>
-                  <c:pt idx="60">
-                    <c:v/>
-                  </c:pt>
-                  <c:pt idx="61">
-                    <c:v/>
-                  </c:pt>
-                  <c:pt idx="62">
-                    <c:v/>
-                  </c:pt>
-                  <c:pt idx="63">
-                    <c:v/>
-                  </c:pt>
-                  <c:pt idx="64">
-                    <c:v/>
-                  </c:pt>
-                  <c:pt idx="65">
-                    <c:v/>
-                  </c:pt>
-                  <c:pt idx="66">
-                    <c:v/>
-                  </c:pt>
-                  <c:pt idx="67">
-                    <c:v/>
-                  </c:pt>
-                  <c:pt idx="68">
-                    <c:v/>
-                  </c:pt>
-                  <c:pt idx="69">
-                    <c:v/>
-                  </c:pt>
-                  <c:pt idx="70">
-                    <c:v/>
-                  </c:pt>
-                  <c:pt idx="71">
-                    <c:v/>
-                  </c:pt>
-                  <c:pt idx="72">
-                    <c:v/>
-                  </c:pt>
-                  <c:pt idx="73">
-                    <c:v/>
-                  </c:pt>
-                  <c:pt idx="74">
-                    <c:v/>
-                  </c:pt>
-                  <c:pt idx="75">
-                    <c:v/>
-                  </c:pt>
-                  <c:pt idx="76">
-                    <c:v/>
-                  </c:pt>
-                  <c:pt idx="77">
-                    <c:v/>
-                  </c:pt>
-                  <c:pt idx="78">
-                    <c:v/>
-                  </c:pt>
-                  <c:pt idx="79">
-                    <c:v/>
-                  </c:pt>
-                  <c:pt idx="80">
-                    <c:v/>
-                  </c:pt>
-                  <c:pt idx="81">
-                    <c:v/>
-                  </c:pt>
-                  <c:pt idx="82">
-                    <c:v/>
-                  </c:pt>
-                  <c:pt idx="83">
-                    <c:v/>
-                  </c:pt>
-                  <c:pt idx="84">
-                    <c:v/>
-                  </c:pt>
-                  <c:pt idx="85">
-                    <c:v/>
-                  </c:pt>
-                  <c:pt idx="86">
-                    <c:v/>
-                  </c:pt>
-                  <c:pt idx="87">
-                    <c:v/>
-                  </c:pt>
-                  <c:pt idx="88">
-                    <c:v/>
-                  </c:pt>
-                  <c:pt idx="89">
-                    <c:v/>
-                  </c:pt>
-                  <c:pt idx="90">
-                    <c:v/>
-                  </c:pt>
-                  <c:pt idx="91">
-                    <c:v/>
-                  </c:pt>
-                  <c:pt idx="92">
-                    <c:v/>
-                  </c:pt>
-                  <c:pt idx="93">
-                    <c:v/>
-                  </c:pt>
-                  <c:pt idx="94">
-                    <c:v/>
-                  </c:pt>
-                  <c:pt idx="95">
-                    <c:v/>
-                  </c:pt>
-                  <c:pt idx="96">
-                    <c:v/>
-                  </c:pt>
-                  <c:pt idx="97">
-                    <c:v/>
-                  </c:pt>
-                  <c:pt idx="98">
-                    <c:v/>
-                  </c:pt>
-                  <c:pt idx="99">
-                    <c:v/>
-                  </c:pt>
-                  <c:pt idx="100">
-                    <c:v/>
-                  </c:pt>
-                  <c:pt idx="101">
-                    <c:v/>
-                  </c:pt>
-                  <c:pt idx="102">
-                    <c:v/>
-                  </c:pt>
-                  <c:pt idx="103">
-                    <c:v/>
-                  </c:pt>
-                  <c:pt idx="104">
-                    <c:v/>
-                  </c:pt>
-                  <c:pt idx="105">
-                    <c:v/>
-                  </c:pt>
-                  <c:pt idx="106">
-                    <c:v/>
-                  </c:pt>
-                  <c:pt idx="107">
-                    <c:v/>
-                  </c:pt>
-                  <c:pt idx="108">
-                    <c:v/>
-                  </c:pt>
-                  <c:pt idx="109">
-                    <c:v/>
-                  </c:pt>
-                  <c:pt idx="110">
-                    <c:v/>
-                  </c:pt>
-                  <c:pt idx="111">
-                    <c:v/>
-                  </c:pt>
-                  <c:pt idx="112">
-                    <c:v/>
-                  </c:pt>
-                  <c:pt idx="113">
-                    <c:v/>
-                  </c:pt>
-                  <c:pt idx="114">
-                    <c:v/>
-                  </c:pt>
-                  <c:pt idx="115">
-                    <c:v/>
-                  </c:pt>
-                  <c:pt idx="116">
-                    <c:v/>
-                  </c:pt>
-                  <c:pt idx="117">
-                    <c:v/>
-                  </c:pt>
-                  <c:pt idx="118">
-                    <c:v/>
-                  </c:pt>
-                  <c:pt idx="119">
-                    <c:v/>
-                  </c:pt>
-                  <c:pt idx="120">
-                    <c:v/>
-                  </c:pt>
-                  <c:pt idx="121">
-                    <c:v/>
-                  </c:pt>
-                  <c:pt idx="122">
-                    <c:v/>
-                  </c:pt>
-                  <c:pt idx="123">
-                    <c:v/>
-                  </c:pt>
-                  <c:pt idx="124">
-                    <c:v/>
-                  </c:pt>
-                  <c:pt idx="125">
-                    <c:v/>
-                  </c:pt>
-                  <c:pt idx="126">
-                    <c:v/>
-                  </c:pt>
-                  <c:pt idx="127">
-                    <c:v/>
-                  </c:pt>
-                  <c:pt idx="128">
-                    <c:v/>
-                  </c:pt>
-                  <c:pt idx="129">
-                    <c:v/>
-                  </c:pt>
-                  <c:pt idx="130">
-                    <c:v/>
-                  </c:pt>
-                  <c:pt idx="131">
-                    <c:v/>
-                  </c:pt>
-                  <c:pt idx="132">
-                    <c:v/>
-                  </c:pt>
-                  <c:pt idx="133">
-                    <c:v/>
-                  </c:pt>
-                  <c:pt idx="134">
-                    <c:v/>
-                  </c:pt>
-                  <c:pt idx="135">
-                    <c:v/>
-                  </c:pt>
-                  <c:pt idx="136">
-                    <c:v/>
-                  </c:pt>
-                  <c:pt idx="137">
-                    <c:v/>
-                  </c:pt>
-                  <c:pt idx="138">
-                    <c:v/>
-                  </c:pt>
-                  <c:pt idx="139">
-                    <c:v/>
-                  </c:pt>
-                  <c:pt idx="140">
-                    <c:v/>
-                  </c:pt>
-                  <c:pt idx="141">
-                    <c:v/>
-                  </c:pt>
-                  <c:pt idx="142">
-                    <c:v/>
-                  </c:pt>
-                  <c:pt idx="143">
-                    <c:v/>
-                  </c:pt>
-                  <c:pt idx="144">
-                    <c:v/>
-                  </c:pt>
-                  <c:pt idx="145">
-                    <c:v/>
-                  </c:pt>
-                  <c:pt idx="146">
-                    <c:v/>
-                  </c:pt>
-                  <c:pt idx="147">
-                    <c:v/>
-                  </c:pt>
-                  <c:pt idx="148">
-                    <c:v/>
-                  </c:pt>
-                  <c:pt idx="149">
-                    <c:v/>
-                  </c:pt>
-                  <c:pt idx="150">
-                    <c:v/>
-                  </c:pt>
-                  <c:pt idx="151">
-                    <c:v/>
-                  </c:pt>
-                  <c:pt idx="152">
-                    <c:v/>
-                  </c:pt>
-                  <c:pt idx="153">
-                    <c:v/>
-                  </c:pt>
-                  <c:pt idx="154">
-                    <c:v/>
-                  </c:pt>
-                  <c:pt idx="155">
-                    <c:v/>
-                  </c:pt>
-                  <c:pt idx="156">
-                    <c:v/>
-                  </c:pt>
-                  <c:pt idx="157">
-                    <c:v/>
-                  </c:pt>
-                  <c:pt idx="158">
-                    <c:v/>
-                  </c:pt>
-                  <c:pt idx="159">
-                    <c:v/>
-                  </c:pt>
-                  <c:pt idx="160">
-                    <c:v/>
-                  </c:pt>
-                  <c:pt idx="161">
-                    <c:v/>
-                  </c:pt>
-                  <c:pt idx="162">
-                    <c:v/>
-                  </c:pt>
-                  <c:pt idx="163">
-                    <c:v/>
-                  </c:pt>
-                  <c:pt idx="164">
-                    <c:v/>
-                  </c:pt>
-                  <c:pt idx="165">
-                    <c:v/>
-                  </c:pt>
-                  <c:pt idx="166">
-                    <c:v/>
-                  </c:pt>
-                  <c:pt idx="167">
-                    <c:v/>
-                  </c:pt>
-                  <c:pt idx="168">
-                    <c:v/>
-                  </c:pt>
-                  <c:pt idx="169">
-                    <c:v/>
-                  </c:pt>
-                  <c:pt idx="170">
-                    <c:v/>
-                  </c:pt>
-                  <c:pt idx="171">
-                    <c:v/>
-                  </c:pt>
-                  <c:pt idx="172">
-                    <c:v/>
-                  </c:pt>
-                  <c:pt idx="173">
-                    <c:v/>
-                  </c:pt>
-                  <c:pt idx="174">
-                    <c:v/>
-                  </c:pt>
-                  <c:pt idx="175">
-                    <c:v/>
-                  </c:pt>
-                  <c:pt idx="176">
-                    <c:v/>
-                  </c:pt>
-                  <c:pt idx="177">
-                    <c:v/>
-                  </c:pt>
-                  <c:pt idx="178">
-                    <c:v/>
-                  </c:pt>
-                  <c:pt idx="179">
-                    <c:v/>
-                  </c:pt>
-                  <c:pt idx="180">
-                    <c:v/>
-                  </c:pt>
-                  <c:pt idx="181">
-                    <c:v/>
-                  </c:pt>
-                  <c:pt idx="182">
-                    <c:v/>
-                  </c:pt>
-                  <c:pt idx="183">
-                    <c:v/>
-                  </c:pt>
-                  <c:pt idx="184">
-                    <c:v/>
-                  </c:pt>
-                  <c:pt idx="185">
-                    <c:v/>
-                  </c:pt>
-                  <c:pt idx="186">
-                    <c:v/>
-                  </c:pt>
-                  <c:pt idx="187">
-                    <c:v/>
-                  </c:pt>
-                  <c:pt idx="188">
-                    <c:v/>
-                  </c:pt>
-                  <c:pt idx="189">
-                    <c:v/>
-                  </c:pt>
-                  <c:pt idx="190">
-                    <c:v/>
-                  </c:pt>
-                  <c:pt idx="191">
-                    <c:v/>
-                  </c:pt>
-                  <c:pt idx="192">
-                    <c:v/>
-                  </c:pt>
-                  <c:pt idx="193">
-                    <c:v/>
-                  </c:pt>
-                  <c:pt idx="194">
-                    <c:v/>
-                  </c:pt>
-                  <c:pt idx="195">
-                    <c:v/>
-                  </c:pt>
-                  <c:pt idx="196">
-                    <c:v/>
-                  </c:pt>
-                  <c:pt idx="197">
-                    <c:v/>
-                  </c:pt>
-                  <c:pt idx="198">
-                    <c:v/>
-                  </c:pt>
-                  <c:pt idx="199">
-                    <c:v/>
-                  </c:pt>
-                  <c:pt idx="200">
-                    <c:v/>
-                  </c:pt>
-                  <c:pt idx="201">
-                    <c:v/>
-                  </c:pt>
-                  <c:pt idx="202">
-                    <c:v/>
-                  </c:pt>
-                  <c:pt idx="203">
-                    <c:v/>
-                  </c:pt>
-                  <c:pt idx="204">
-                    <c:v/>
-                  </c:pt>
-                  <c:pt idx="205">
-                    <c:v/>
-                  </c:pt>
-                  <c:pt idx="206">
-                    <c:v/>
-                  </c:pt>
-                  <c:pt idx="207">
-                    <c:v/>
-                  </c:pt>
-                  <c:pt idx="208">
-                    <c:v/>
-                  </c:pt>
-                  <c:pt idx="209">
-                    <c:v/>
-                  </c:pt>
-                  <c:pt idx="210">
-                    <c:v/>
-                  </c:pt>
-                  <c:pt idx="211">
-                    <c:v/>
-                  </c:pt>
-                  <c:pt idx="212">
-                    <c:v/>
-                  </c:pt>
-                  <c:pt idx="213">
-                    <c:v/>
-                  </c:pt>
-                  <c:pt idx="214">
-                    <c:v/>
-                  </c:pt>
-                  <c:pt idx="215">
-                    <c:v/>
-                  </c:pt>
-                  <c:pt idx="216">
-                    <c:v/>
-                  </c:pt>
-                  <c:pt idx="217">
-                    <c:v/>
-                  </c:pt>
-                  <c:pt idx="218">
-                    <c:v/>
-                  </c:pt>
-                  <c:pt idx="219">
-                    <c:v/>
-                  </c:pt>
-                  <c:pt idx="220">
-                    <c:v/>
-                  </c:pt>
-                  <c:pt idx="221">
-                    <c:v/>
-                  </c:pt>
-                  <c:pt idx="222">
-                    <c:v/>
-                  </c:pt>
-                  <c:pt idx="223">
-                    <c:v/>
-                  </c:pt>
-                  <c:pt idx="224">
-                    <c:v/>
-                  </c:pt>
-                  <c:pt idx="225">
-                    <c:v/>
-                  </c:pt>
-                  <c:pt idx="226">
-                    <c:v/>
-                  </c:pt>
-                  <c:pt idx="227">
-                    <c:v/>
-                  </c:pt>
-                  <c:pt idx="228">
-                    <c:v/>
-                  </c:pt>
-                  <c:pt idx="229">
-                    <c:v/>
-                  </c:pt>
-                  <c:pt idx="230">
-                    <c:v/>
-                  </c:pt>
-                  <c:pt idx="231">
-                    <c:v/>
-                  </c:pt>
-                  <c:pt idx="232">
-                    <c:v/>
-                  </c:pt>
-                  <c:pt idx="233">
-                    <c:v/>
-                  </c:pt>
-                  <c:pt idx="234">
-                    <c:v/>
-                  </c:pt>
-                  <c:pt idx="235">
-                    <c:v/>
-                  </c:pt>
-                  <c:pt idx="236">
-                    <c:v/>
-                  </c:pt>
-                  <c:pt idx="237">
-                    <c:v/>
-                  </c:pt>
-                  <c:pt idx="238">
-                    <c:v/>
-                  </c:pt>
-                  <c:pt idx="239">
-                    <c:v/>
-                  </c:pt>
-                  <c:pt idx="240">
-                    <c:v/>
-                  </c:pt>
-                  <c:pt idx="241">
-                    <c:v/>
-                  </c:pt>
-                  <c:pt idx="242">
-                    <c:v/>
-                  </c:pt>
-                  <c:pt idx="243">
-                    <c:v/>
-                  </c:pt>
-                  <c:pt idx="244">
-                    <c:v/>
-                  </c:pt>
-                  <c:pt idx="245">
-                    <c:v/>
-                  </c:pt>
-                  <c:pt idx="246">
-                    <c:v/>
-                  </c:pt>
-                  <c:pt idx="247">
-                    <c:v/>
-                  </c:pt>
-                  <c:pt idx="248">
-                    <c:v/>
-                  </c:pt>
-                  <c:pt idx="249">
-                    <c:v/>
-                  </c:pt>
-                  <c:pt idx="250">
-                    <c:v/>
-                  </c:pt>
-                  <c:pt idx="251">
-                    <c:v/>
-                  </c:pt>
-                  <c:pt idx="252">
-                    <c:v/>
-                  </c:pt>
-                  <c:pt idx="253">
-                    <c:v/>
-                  </c:pt>
-                  <c:pt idx="254">
-                    <c:v/>
-                  </c:pt>
-                  <c:pt idx="255">
-                    <c:v/>
-                  </c:pt>
-                  <c:pt idx="256">
-                    <c:v/>
-                  </c:pt>
-                  <c:pt idx="257">
-                    <c:v/>
-                  </c:pt>
-                  <c:pt idx="258">
-                    <c:v/>
-                  </c:pt>
-                  <c:pt idx="259">
-                    <c:v/>
-                  </c:pt>
-                  <c:pt idx="260">
-                    <c:v/>
-                  </c:pt>
-                  <c:pt idx="261">
-                    <c:v/>
-                  </c:pt>
-                  <c:pt idx="262">
-                    <c:v/>
-                  </c:pt>
-                  <c:pt idx="263">
-                    <c:v/>
-                  </c:pt>
-                  <c:pt idx="264">
-                    <c:v/>
-                  </c:pt>
-                  <c:pt idx="265">
-                    <c:v/>
-                  </c:pt>
-                  <c:pt idx="266">
-                    <c:v/>
-                  </c:pt>
-                  <c:pt idx="267">
-                    <c:v/>
-                  </c:pt>
-                  <c:pt idx="268">
-                    <c:v/>
-                  </c:pt>
-                  <c:pt idx="269">
-                    <c:v/>
-                  </c:pt>
-                  <c:pt idx="270">
-                    <c:v/>
-                  </c:pt>
-                  <c:pt idx="271">
-                    <c:v/>
-                  </c:pt>
-                  <c:pt idx="272">
-                    <c:v/>
-                  </c:pt>
-                  <c:pt idx="273">
-                    <c:v/>
-                  </c:pt>
-                  <c:pt idx="274">
-                    <c:v/>
-                  </c:pt>
-                  <c:pt idx="275">
-                    <c:v/>
-                  </c:pt>
-                  <c:pt idx="276">
-                    <c:v/>
-                  </c:pt>
-                  <c:pt idx="277">
-                    <c:v/>
-                  </c:pt>
-                  <c:pt idx="278">
-                    <c:v/>
-                  </c:pt>
-                  <c:pt idx="279">
-                    <c:v/>
-                  </c:pt>
-                  <c:pt idx="280">
-                    <c:v/>
-                  </c:pt>
-                  <c:pt idx="281">
-                    <c:v/>
-                  </c:pt>
-                  <c:pt idx="282">
-                    <c:v/>
-                  </c:pt>
-                  <c:pt idx="283">
-                    <c:v/>
-                  </c:pt>
-                  <c:pt idx="284">
-                    <c:v/>
-                  </c:pt>
-                  <c:pt idx="285">
-                    <c:v/>
-                  </c:pt>
-                  <c:pt idx="286">
-                    <c:v/>
-                  </c:pt>
-                  <c:pt idx="287">
-                    <c:v/>
-                  </c:pt>
                   <c:pt idx="288">
                     <c:v>22/02</c:v>
                   </c:pt>
-                  <c:pt idx="289">
-                    <c:v/>
-                  </c:pt>
-                  <c:pt idx="290">
-                    <c:v/>
-                  </c:pt>
-                  <c:pt idx="291">
-                    <c:v/>
-                  </c:pt>
-                  <c:pt idx="292">
-                    <c:v/>
-                  </c:pt>
-                  <c:pt idx="293">
-                    <c:v/>
-                  </c:pt>
-                  <c:pt idx="294">
-                    <c:v/>
-                  </c:pt>
-                  <c:pt idx="295">
-                    <c:v/>
-                  </c:pt>
-                  <c:pt idx="296">
-                    <c:v/>
-                  </c:pt>
-                  <c:pt idx="297">
-                    <c:v/>
-                  </c:pt>
-                  <c:pt idx="298">
-                    <c:v/>
-                  </c:pt>
-                  <c:pt idx="299">
-                    <c:v/>
-                  </c:pt>
-                  <c:pt idx="300">
-                    <c:v/>
-                  </c:pt>
-                  <c:pt idx="301">
-                    <c:v/>
-                  </c:pt>
-                  <c:pt idx="302">
-                    <c:v/>
-                  </c:pt>
-                  <c:pt idx="303">
-                    <c:v/>
-                  </c:pt>
-                  <c:pt idx="304">
-                    <c:v/>
-                  </c:pt>
-                  <c:pt idx="305">
-                    <c:v/>
-                  </c:pt>
-                  <c:pt idx="306">
-                    <c:v/>
-                  </c:pt>
-                  <c:pt idx="307">
-                    <c:v/>
-                  </c:pt>
-                  <c:pt idx="308">
-                    <c:v/>
-                  </c:pt>
-                  <c:pt idx="309">
-                    <c:v/>
-                  </c:pt>
-                  <c:pt idx="310">
-                    <c:v/>
-                  </c:pt>
-                  <c:pt idx="311">
-                    <c:v/>
-                  </c:pt>
-                  <c:pt idx="312">
-                    <c:v/>
-                  </c:pt>
-                  <c:pt idx="313">
-                    <c:v/>
-                  </c:pt>
-                  <c:pt idx="314">
-                    <c:v/>
-                  </c:pt>
-                  <c:pt idx="315">
-                    <c:v/>
-                  </c:pt>
-                  <c:pt idx="316">
-                    <c:v/>
-                  </c:pt>
-                  <c:pt idx="317">
-                    <c:v/>
-                  </c:pt>
-                  <c:pt idx="318">
-                    <c:v/>
-                  </c:pt>
-                  <c:pt idx="319">
-                    <c:v/>
-                  </c:pt>
-                  <c:pt idx="320">
-                    <c:v/>
-                  </c:pt>
-                  <c:pt idx="321">
-                    <c:v/>
-                  </c:pt>
-                  <c:pt idx="322">
-                    <c:v/>
-                  </c:pt>
-                  <c:pt idx="323">
-                    <c:v/>
-                  </c:pt>
-                  <c:pt idx="324">
-                    <c:v/>
-                  </c:pt>
-                  <c:pt idx="325">
-                    <c:v/>
-                  </c:pt>
-                  <c:pt idx="326">
-                    <c:v/>
-                  </c:pt>
-                  <c:pt idx="327">
-                    <c:v/>
-                  </c:pt>
-                  <c:pt idx="328">
-                    <c:v/>
-                  </c:pt>
-                  <c:pt idx="329">
-                    <c:v/>
-                  </c:pt>
-                  <c:pt idx="330">
-                    <c:v/>
-                  </c:pt>
-                  <c:pt idx="331">
-                    <c:v/>
-                  </c:pt>
-                  <c:pt idx="332">
-                    <c:v/>
-                  </c:pt>
-                  <c:pt idx="333">
-                    <c:v/>
-                  </c:pt>
-                  <c:pt idx="334">
-                    <c:v/>
-                  </c:pt>
-                  <c:pt idx="335">
-                    <c:v/>
-                  </c:pt>
-                  <c:pt idx="336">
-                    <c:v/>
-                  </c:pt>
-                  <c:pt idx="337">
-                    <c:v/>
-                  </c:pt>
-                  <c:pt idx="338">
-                    <c:v/>
-                  </c:pt>
-                  <c:pt idx="339">
-                    <c:v/>
-                  </c:pt>
-                  <c:pt idx="340">
-                    <c:v/>
-                  </c:pt>
-                  <c:pt idx="341">
-                    <c:v/>
-                  </c:pt>
-                  <c:pt idx="342">
-                    <c:v/>
-                  </c:pt>
-                  <c:pt idx="343">
-                    <c:v/>
-                  </c:pt>
-                  <c:pt idx="344">
-                    <c:v/>
-                  </c:pt>
-                  <c:pt idx="345">
-                    <c:v/>
-                  </c:pt>
-                  <c:pt idx="346">
-                    <c:v/>
-                  </c:pt>
-                  <c:pt idx="347">
-                    <c:v/>
-                  </c:pt>
-                  <c:pt idx="348">
-                    <c:v/>
-                  </c:pt>
-                  <c:pt idx="349">
-                    <c:v/>
-                  </c:pt>
-                  <c:pt idx="350">
-                    <c:v/>
-                  </c:pt>
-                  <c:pt idx="351">
-                    <c:v/>
-                  </c:pt>
-                  <c:pt idx="352">
-                    <c:v/>
-                  </c:pt>
-                  <c:pt idx="353">
-                    <c:v/>
-                  </c:pt>
-                  <c:pt idx="354">
-                    <c:v/>
-                  </c:pt>
-                  <c:pt idx="355">
-                    <c:v/>
-                  </c:pt>
-                  <c:pt idx="356">
-                    <c:v/>
-                  </c:pt>
-                  <c:pt idx="357">
-                    <c:v/>
-                  </c:pt>
-                  <c:pt idx="358">
-                    <c:v/>
-                  </c:pt>
-                  <c:pt idx="359">
-                    <c:v/>
-                  </c:pt>
-                  <c:pt idx="360">
-                    <c:v/>
-                  </c:pt>
-                  <c:pt idx="361">
-                    <c:v/>
-                  </c:pt>
-                  <c:pt idx="362">
-                    <c:v/>
-                  </c:pt>
-                  <c:pt idx="363">
-                    <c:v/>
-                  </c:pt>
-                  <c:pt idx="364">
-                    <c:v/>
-                  </c:pt>
-                  <c:pt idx="365">
-                    <c:v/>
-                  </c:pt>
-                  <c:pt idx="366">
-                    <c:v/>
-                  </c:pt>
-                  <c:pt idx="367">
-                    <c:v/>
-                  </c:pt>
-                  <c:pt idx="368">
-                    <c:v/>
-                  </c:pt>
-                  <c:pt idx="369">
-                    <c:v/>
-                  </c:pt>
-                  <c:pt idx="370">
-                    <c:v/>
-                  </c:pt>
-                  <c:pt idx="371">
-                    <c:v/>
-                  </c:pt>
-                  <c:pt idx="372">
-                    <c:v/>
-                  </c:pt>
-                  <c:pt idx="373">
-                    <c:v/>
-                  </c:pt>
-                  <c:pt idx="374">
-                    <c:v/>
-                  </c:pt>
-                  <c:pt idx="375">
-                    <c:v/>
-                  </c:pt>
-                  <c:pt idx="376">
-                    <c:v/>
-                  </c:pt>
-                  <c:pt idx="377">
-                    <c:v/>
-                  </c:pt>
-                  <c:pt idx="378">
-                    <c:v/>
-                  </c:pt>
-                  <c:pt idx="379">
-                    <c:v/>
-                  </c:pt>
-                  <c:pt idx="380">
-                    <c:v/>
-                  </c:pt>
-                  <c:pt idx="381">
-                    <c:v/>
-                  </c:pt>
-                  <c:pt idx="382">
-                    <c:v/>
-                  </c:pt>
-                  <c:pt idx="383">
-                    <c:v/>
-                  </c:pt>
-                  <c:pt idx="384">
-                    <c:v/>
-                  </c:pt>
-                  <c:pt idx="385">
-                    <c:v/>
-                  </c:pt>
-                  <c:pt idx="386">
-                    <c:v/>
-                  </c:pt>
-                  <c:pt idx="387">
-                    <c:v/>
-                  </c:pt>
-                  <c:pt idx="388">
-                    <c:v/>
-                  </c:pt>
-                  <c:pt idx="389">
-                    <c:v/>
-                  </c:pt>
-                  <c:pt idx="390">
-                    <c:v/>
-                  </c:pt>
-                  <c:pt idx="391">
-                    <c:v/>
-                  </c:pt>
-                  <c:pt idx="392">
-                    <c:v/>
-                  </c:pt>
-                  <c:pt idx="393">
-                    <c:v/>
-                  </c:pt>
-                  <c:pt idx="394">
-                    <c:v/>
-                  </c:pt>
-                  <c:pt idx="395">
-                    <c:v/>
-                  </c:pt>
-                  <c:pt idx="396">
-                    <c:v/>
-                  </c:pt>
-                  <c:pt idx="397">
-                    <c:v/>
-                  </c:pt>
-                  <c:pt idx="398">
-                    <c:v/>
-                  </c:pt>
-                  <c:pt idx="399">
-                    <c:v/>
-                  </c:pt>
-                  <c:pt idx="400">
-                    <c:v/>
-                  </c:pt>
-                  <c:pt idx="401">
-                    <c:v/>
-                  </c:pt>
-                  <c:pt idx="402">
-                    <c:v/>
-                  </c:pt>
-                  <c:pt idx="403">
-                    <c:v/>
-                  </c:pt>
-                  <c:pt idx="404">
-                    <c:v/>
-                  </c:pt>
-                  <c:pt idx="405">
-                    <c:v/>
-                  </c:pt>
-                  <c:pt idx="406">
-                    <c:v/>
-                  </c:pt>
-                  <c:pt idx="407">
-                    <c:v/>
-                  </c:pt>
-                  <c:pt idx="408">
-                    <c:v/>
-                  </c:pt>
-                  <c:pt idx="409">
-                    <c:v/>
-                  </c:pt>
-                  <c:pt idx="410">
-                    <c:v/>
-                  </c:pt>
-                  <c:pt idx="411">
-                    <c:v/>
-                  </c:pt>
-                  <c:pt idx="412">
-                    <c:v/>
-                  </c:pt>
-                  <c:pt idx="413">
-                    <c:v/>
-                  </c:pt>
-                  <c:pt idx="414">
-                    <c:v/>
-                  </c:pt>
-                  <c:pt idx="415">
-                    <c:v/>
-                  </c:pt>
-                  <c:pt idx="416">
-                    <c:v/>
-                  </c:pt>
-                  <c:pt idx="417">
-                    <c:v/>
-                  </c:pt>
-                  <c:pt idx="418">
-                    <c:v/>
-                  </c:pt>
-                  <c:pt idx="419">
-                    <c:v/>
-                  </c:pt>
-                  <c:pt idx="420">
-                    <c:v/>
-                  </c:pt>
-                  <c:pt idx="421">
-                    <c:v/>
-                  </c:pt>
-                  <c:pt idx="422">
-                    <c:v/>
-                  </c:pt>
-                  <c:pt idx="423">
-                    <c:v/>
-                  </c:pt>
-                  <c:pt idx="424">
-                    <c:v/>
-                  </c:pt>
-                  <c:pt idx="425">
-                    <c:v/>
-                  </c:pt>
-                  <c:pt idx="426">
-                    <c:v/>
-                  </c:pt>
-                  <c:pt idx="427">
-                    <c:v/>
-                  </c:pt>
-                  <c:pt idx="428">
-                    <c:v/>
-                  </c:pt>
-                  <c:pt idx="429">
-                    <c:v/>
-                  </c:pt>
-                  <c:pt idx="430">
-                    <c:v/>
-                  </c:pt>
-                  <c:pt idx="431">
-                    <c:v/>
-                  </c:pt>
-                  <c:pt idx="432">
-                    <c:v/>
-                  </c:pt>
-                  <c:pt idx="433">
-                    <c:v/>
-                  </c:pt>
-                  <c:pt idx="434">
-                    <c:v/>
-                  </c:pt>
-                  <c:pt idx="435">
-                    <c:v/>
-                  </c:pt>
-                  <c:pt idx="436">
-                    <c:v/>
-                  </c:pt>
-                  <c:pt idx="437">
-                    <c:v/>
-                  </c:pt>
-                  <c:pt idx="438">
-                    <c:v/>
-                  </c:pt>
-                  <c:pt idx="439">
-                    <c:v/>
-                  </c:pt>
-                  <c:pt idx="440">
-                    <c:v/>
-                  </c:pt>
-                  <c:pt idx="441">
-                    <c:v/>
-                  </c:pt>
-                  <c:pt idx="442">
-                    <c:v/>
-                  </c:pt>
-                  <c:pt idx="443">
-                    <c:v/>
-                  </c:pt>
-                  <c:pt idx="444">
-                    <c:v/>
-                  </c:pt>
-                  <c:pt idx="445">
-                    <c:v/>
-                  </c:pt>
-                  <c:pt idx="446">
-                    <c:v/>
-                  </c:pt>
-                  <c:pt idx="447">
-                    <c:v/>
-                  </c:pt>
-                  <c:pt idx="448">
-                    <c:v/>
-                  </c:pt>
-                  <c:pt idx="449">
-                    <c:v/>
-                  </c:pt>
-                  <c:pt idx="450">
-                    <c:v/>
-                  </c:pt>
-                  <c:pt idx="451">
-                    <c:v/>
-                  </c:pt>
-                  <c:pt idx="452">
-                    <c:v/>
-                  </c:pt>
-                  <c:pt idx="453">
-                    <c:v/>
-                  </c:pt>
-                  <c:pt idx="454">
-                    <c:v/>
-                  </c:pt>
-                  <c:pt idx="455">
-                    <c:v/>
-                  </c:pt>
-                  <c:pt idx="456">
-                    <c:v/>
-                  </c:pt>
-                  <c:pt idx="457">
-                    <c:v/>
-                  </c:pt>
-                  <c:pt idx="458">
-                    <c:v/>
-                  </c:pt>
-                  <c:pt idx="459">
-                    <c:v/>
-                  </c:pt>
-                  <c:pt idx="460">
-                    <c:v/>
-                  </c:pt>
-                  <c:pt idx="461">
-                    <c:v/>
-                  </c:pt>
-                  <c:pt idx="462">
-                    <c:v/>
-                  </c:pt>
-                  <c:pt idx="463">
-                    <c:v/>
-                  </c:pt>
-                  <c:pt idx="464">
-                    <c:v/>
-                  </c:pt>
-                  <c:pt idx="465">
-                    <c:v/>
-                  </c:pt>
-                  <c:pt idx="466">
-                    <c:v/>
-                  </c:pt>
-                  <c:pt idx="467">
-                    <c:v/>
-                  </c:pt>
-                  <c:pt idx="468">
-                    <c:v/>
-                  </c:pt>
-                  <c:pt idx="469">
-                    <c:v/>
-                  </c:pt>
-                  <c:pt idx="470">
-                    <c:v/>
-                  </c:pt>
-                  <c:pt idx="471">
-                    <c:v/>
-                  </c:pt>
-                  <c:pt idx="472">
-                    <c:v/>
-                  </c:pt>
-                  <c:pt idx="473">
-                    <c:v/>
-                  </c:pt>
-                  <c:pt idx="474">
-                    <c:v/>
-                  </c:pt>
-                  <c:pt idx="475">
-                    <c:v/>
-                  </c:pt>
-                  <c:pt idx="476">
-                    <c:v/>
-                  </c:pt>
-                  <c:pt idx="477">
-                    <c:v/>
-                  </c:pt>
-                  <c:pt idx="478">
-                    <c:v/>
-                  </c:pt>
-                  <c:pt idx="479">
-                    <c:v/>
-                  </c:pt>
-                  <c:pt idx="480">
-                    <c:v/>
-                  </c:pt>
-                  <c:pt idx="481">
-                    <c:v/>
-                  </c:pt>
-                  <c:pt idx="482">
-                    <c:v/>
-                  </c:pt>
-                  <c:pt idx="483">
-                    <c:v/>
-                  </c:pt>
-                  <c:pt idx="484">
-                    <c:v/>
-                  </c:pt>
-                  <c:pt idx="485">
-                    <c:v/>
-                  </c:pt>
-                  <c:pt idx="486">
-                    <c:v/>
-                  </c:pt>
-                  <c:pt idx="487">
-                    <c:v/>
-                  </c:pt>
-                  <c:pt idx="488">
-                    <c:v/>
-                  </c:pt>
-                  <c:pt idx="489">
-                    <c:v/>
-                  </c:pt>
-                  <c:pt idx="490">
-                    <c:v/>
-                  </c:pt>
-                  <c:pt idx="491">
-                    <c:v/>
-                  </c:pt>
-                  <c:pt idx="492">
-                    <c:v/>
-                  </c:pt>
-                  <c:pt idx="493">
-                    <c:v/>
-                  </c:pt>
-                  <c:pt idx="494">
-                    <c:v/>
-                  </c:pt>
-                  <c:pt idx="495">
-                    <c:v/>
-                  </c:pt>
-                  <c:pt idx="496">
-                    <c:v/>
-                  </c:pt>
-                  <c:pt idx="497">
-                    <c:v/>
-                  </c:pt>
-                  <c:pt idx="498">
-                    <c:v/>
-                  </c:pt>
-                  <c:pt idx="499">
-                    <c:v/>
-                  </c:pt>
-                  <c:pt idx="500">
-                    <c:v/>
-                  </c:pt>
-                  <c:pt idx="501">
-                    <c:v/>
-                  </c:pt>
-                  <c:pt idx="502">
-                    <c:v/>
-                  </c:pt>
-                  <c:pt idx="503">
-                    <c:v/>
-                  </c:pt>
-                  <c:pt idx="504">
-                    <c:v/>
-                  </c:pt>
-                  <c:pt idx="505">
-                    <c:v/>
-                  </c:pt>
-                  <c:pt idx="506">
-                    <c:v/>
-                  </c:pt>
-                  <c:pt idx="507">
-                    <c:v/>
-                  </c:pt>
-                  <c:pt idx="508">
-                    <c:v/>
-                  </c:pt>
-                  <c:pt idx="509">
-                    <c:v/>
-                  </c:pt>
-                  <c:pt idx="510">
-                    <c:v/>
-                  </c:pt>
-                  <c:pt idx="511">
-                    <c:v/>
-                  </c:pt>
-                  <c:pt idx="512">
-                    <c:v/>
-                  </c:pt>
-                  <c:pt idx="513">
-                    <c:v/>
-                  </c:pt>
-                  <c:pt idx="514">
-                    <c:v/>
-                  </c:pt>
-                  <c:pt idx="515">
-                    <c:v/>
-                  </c:pt>
-                  <c:pt idx="516">
-                    <c:v/>
-                  </c:pt>
-                  <c:pt idx="517">
-                    <c:v/>
-                  </c:pt>
-                  <c:pt idx="518">
-                    <c:v/>
-                  </c:pt>
-                  <c:pt idx="519">
-                    <c:v/>
-                  </c:pt>
-                  <c:pt idx="520">
-                    <c:v/>
-                  </c:pt>
-                  <c:pt idx="521">
-                    <c:v/>
-                  </c:pt>
-                  <c:pt idx="522">
-                    <c:v/>
-                  </c:pt>
-                  <c:pt idx="523">
-                    <c:v/>
-                  </c:pt>
-                  <c:pt idx="524">
-                    <c:v/>
-                  </c:pt>
-                  <c:pt idx="525">
-                    <c:v/>
-                  </c:pt>
-                  <c:pt idx="526">
-                    <c:v/>
-                  </c:pt>
-                  <c:pt idx="527">
-                    <c:v/>
-                  </c:pt>
-                  <c:pt idx="528">
-                    <c:v/>
-                  </c:pt>
-                  <c:pt idx="529">
-                    <c:v/>
-                  </c:pt>
-                  <c:pt idx="530">
-                    <c:v/>
-                  </c:pt>
-                  <c:pt idx="531">
-                    <c:v/>
-                  </c:pt>
-                  <c:pt idx="532">
-                    <c:v/>
-                  </c:pt>
-                  <c:pt idx="533">
-                    <c:v/>
-                  </c:pt>
-                  <c:pt idx="534">
-                    <c:v/>
-                  </c:pt>
-                  <c:pt idx="535">
-                    <c:v/>
-                  </c:pt>
-                  <c:pt idx="536">
-                    <c:v/>
-                  </c:pt>
-                  <c:pt idx="537">
-                    <c:v/>
-                  </c:pt>
-                  <c:pt idx="538">
-                    <c:v/>
-                  </c:pt>
-                  <c:pt idx="539">
-                    <c:v/>
-                  </c:pt>
-                  <c:pt idx="540">
-                    <c:v/>
-                  </c:pt>
-                  <c:pt idx="541">
-                    <c:v/>
-                  </c:pt>
-                  <c:pt idx="542">
-                    <c:v/>
-                  </c:pt>
-                  <c:pt idx="543">
-                    <c:v/>
-                  </c:pt>
-                  <c:pt idx="544">
-                    <c:v/>
-                  </c:pt>
-                  <c:pt idx="545">
-                    <c:v/>
-                  </c:pt>
-                  <c:pt idx="546">
-                    <c:v/>
-                  </c:pt>
-                  <c:pt idx="547">
-                    <c:v/>
-                  </c:pt>
-                  <c:pt idx="548">
-                    <c:v/>
-                  </c:pt>
-                  <c:pt idx="549">
-                    <c:v/>
-                  </c:pt>
-                  <c:pt idx="550">
-                    <c:v/>
-                  </c:pt>
-                  <c:pt idx="551">
-                    <c:v/>
-                  </c:pt>
-                  <c:pt idx="552">
-                    <c:v/>
-                  </c:pt>
-                  <c:pt idx="553">
-                    <c:v/>
-                  </c:pt>
-                  <c:pt idx="554">
-                    <c:v/>
-                  </c:pt>
-                  <c:pt idx="555">
-                    <c:v/>
-                  </c:pt>
-                  <c:pt idx="556">
-                    <c:v/>
-                  </c:pt>
-                  <c:pt idx="557">
-                    <c:v/>
-                  </c:pt>
-                  <c:pt idx="558">
-                    <c:v/>
-                  </c:pt>
-                  <c:pt idx="559">
-                    <c:v/>
-                  </c:pt>
-                  <c:pt idx="560">
-                    <c:v/>
-                  </c:pt>
-                  <c:pt idx="561">
-                    <c:v/>
-                  </c:pt>
-                  <c:pt idx="562">
-                    <c:v/>
-                  </c:pt>
-                  <c:pt idx="563">
-                    <c:v/>
-                  </c:pt>
-                  <c:pt idx="564">
-                    <c:v/>
-                  </c:pt>
-                  <c:pt idx="565">
-                    <c:v/>
-                  </c:pt>
-                  <c:pt idx="566">
-                    <c:v/>
-                  </c:pt>
-                  <c:pt idx="567">
-                    <c:v/>
-                  </c:pt>
-                  <c:pt idx="568">
-                    <c:v/>
-                  </c:pt>
-                  <c:pt idx="569">
-                    <c:v/>
-                  </c:pt>
-                  <c:pt idx="570">
-                    <c:v/>
-                  </c:pt>
-                  <c:pt idx="571">
-                    <c:v/>
-                  </c:pt>
-                  <c:pt idx="572">
-                    <c:v/>
-                  </c:pt>
-                  <c:pt idx="573">
-                    <c:v/>
-                  </c:pt>
-                  <c:pt idx="574">
-                    <c:v/>
-                  </c:pt>
-                  <c:pt idx="575">
-                    <c:v/>
-                  </c:pt>
                   <c:pt idx="576">
                     <c:v>23/02</c:v>
-                  </c:pt>
-                  <c:pt idx="577">
-                    <c:v/>
-                  </c:pt>
-                  <c:pt idx="578">
-                    <c:v/>
-                  </c:pt>
-                  <c:pt idx="579">
-                    <c:v/>
-                  </c:pt>
-                  <c:pt idx="580">
-                    <c:v/>
-                  </c:pt>
-                  <c:pt idx="581">
-                    <c:v/>
-                  </c:pt>
-                  <c:pt idx="582">
-                    <c:v/>
-                  </c:pt>
-                  <c:pt idx="583">
-                    <c:v/>
-                  </c:pt>
-                  <c:pt idx="584">
-                    <c:v/>
-                  </c:pt>
-                  <c:pt idx="585">
-                    <c:v/>
-                  </c:pt>
-                  <c:pt idx="586">
-                    <c:v/>
-                  </c:pt>
-                  <c:pt idx="587">
-                    <c:v/>
-                  </c:pt>
-                  <c:pt idx="588">
-                    <c:v/>
-                  </c:pt>
-                  <c:pt idx="589">
-                    <c:v/>
-                  </c:pt>
-                  <c:pt idx="590">
-                    <c:v/>
-                  </c:pt>
-                  <c:pt idx="591">
-                    <c:v/>
-                  </c:pt>
-                  <c:pt idx="592">
-                    <c:v/>
-                  </c:pt>
-                  <c:pt idx="593">
-                    <c:v/>
-                  </c:pt>
-                  <c:pt idx="594">
-                    <c:v/>
-                  </c:pt>
-                  <c:pt idx="595">
-                    <c:v/>
-                  </c:pt>
-                  <c:pt idx="596">
-                    <c:v/>
-                  </c:pt>
-                  <c:pt idx="597">
-                    <c:v/>
-                  </c:pt>
-                  <c:pt idx="598">
-                    <c:v/>
-                  </c:pt>
-                  <c:pt idx="599">
-                    <c:v/>
-                  </c:pt>
-                  <c:pt idx="600">
-                    <c:v/>
-                  </c:pt>
-                  <c:pt idx="601">
-                    <c:v/>
-                  </c:pt>
-                  <c:pt idx="602">
-                    <c:v/>
-                  </c:pt>
-                  <c:pt idx="603">
-                    <c:v/>
-                  </c:pt>
-                  <c:pt idx="604">
-                    <c:v/>
-                  </c:pt>
-                  <c:pt idx="605">
-                    <c:v/>
-                  </c:pt>
-                  <c:pt idx="606">
-                    <c:v/>
-                  </c:pt>
-                  <c:pt idx="607">
-                    <c:v/>
-                  </c:pt>
-                  <c:pt idx="608">
-                    <c:v/>
-                  </c:pt>
-                  <c:pt idx="609">
-                    <c:v/>
-                  </c:pt>
-                  <c:pt idx="610">
-                    <c:v/>
-                  </c:pt>
-                  <c:pt idx="611">
-                    <c:v/>
-                  </c:pt>
-                  <c:pt idx="612">
-                    <c:v/>
-                  </c:pt>
-                  <c:pt idx="613">
-                    <c:v/>
-                  </c:pt>
-                  <c:pt idx="614">
-                    <c:v/>
-                  </c:pt>
-                  <c:pt idx="615">
-                    <c:v/>
-                  </c:pt>
-                  <c:pt idx="616">
-                    <c:v/>
-                  </c:pt>
-                  <c:pt idx="617">
-                    <c:v/>
-                  </c:pt>
-                  <c:pt idx="618">
-                    <c:v/>
-                  </c:pt>
-                  <c:pt idx="619">
-                    <c:v/>
-                  </c:pt>
-                  <c:pt idx="620">
-                    <c:v/>
-                  </c:pt>
-                  <c:pt idx="621">
-                    <c:v/>
-                  </c:pt>
-                  <c:pt idx="622">
-                    <c:v/>
-                  </c:pt>
-                  <c:pt idx="623">
-                    <c:v/>
-                  </c:pt>
-                  <c:pt idx="624">
-                    <c:v/>
-                  </c:pt>
-                  <c:pt idx="625">
-                    <c:v/>
-                  </c:pt>
-                  <c:pt idx="626">
-                    <c:v/>
-                  </c:pt>
-                  <c:pt idx="627">
-                    <c:v/>
-                  </c:pt>
-                  <c:pt idx="628">
-                    <c:v/>
-                  </c:pt>
-                  <c:pt idx="629">
-                    <c:v/>
-                  </c:pt>
-                  <c:pt idx="630">
-                    <c:v/>
-                  </c:pt>
-                  <c:pt idx="631">
-                    <c:v/>
-                  </c:pt>
-                  <c:pt idx="632">
-                    <c:v/>
-                  </c:pt>
-                  <c:pt idx="633">
-                    <c:v/>
-                  </c:pt>
-                  <c:pt idx="634">
-                    <c:v/>
-                  </c:pt>
-                  <c:pt idx="635">
-                    <c:v/>
-                  </c:pt>
-                  <c:pt idx="636">
-                    <c:v/>
-                  </c:pt>
-                  <c:pt idx="637">
-                    <c:v/>
-                  </c:pt>
-                  <c:pt idx="638">
-                    <c:v/>
-                  </c:pt>
-                  <c:pt idx="639">
-                    <c:v/>
-                  </c:pt>
-                  <c:pt idx="640">
-                    <c:v/>
-                  </c:pt>
-                  <c:pt idx="641">
-                    <c:v/>
-                  </c:pt>
-                  <c:pt idx="642">
-                    <c:v/>
-                  </c:pt>
-                  <c:pt idx="643">
-                    <c:v/>
-                  </c:pt>
-                  <c:pt idx="644">
-                    <c:v/>
-                  </c:pt>
-                  <c:pt idx="645">
-                    <c:v/>
-                  </c:pt>
-                  <c:pt idx="646">
-                    <c:v/>
-                  </c:pt>
-                  <c:pt idx="647">
-                    <c:v/>
-                  </c:pt>
-                  <c:pt idx="648">
-                    <c:v/>
-                  </c:pt>
-                  <c:pt idx="649">
-                    <c:v/>
-                  </c:pt>
-                  <c:pt idx="650">
-                    <c:v/>
-                  </c:pt>
-                  <c:pt idx="651">
-                    <c:v/>
-                  </c:pt>
-                  <c:pt idx="652">
-                    <c:v/>
-                  </c:pt>
-                  <c:pt idx="653">
-                    <c:v/>
-                  </c:pt>
-                  <c:pt idx="654">
-                    <c:v/>
-                  </c:pt>
-                  <c:pt idx="655">
-                    <c:v/>
-                  </c:pt>
-                  <c:pt idx="656">
-                    <c:v/>
-                  </c:pt>
-                  <c:pt idx="657">
-                    <c:v/>
-                  </c:pt>
-                  <c:pt idx="658">
-                    <c:v/>
-                  </c:pt>
-                  <c:pt idx="659">
-                    <c:v/>
-                  </c:pt>
-                  <c:pt idx="660">
-                    <c:v/>
-                  </c:pt>
-                  <c:pt idx="661">
-                    <c:v/>
-                  </c:pt>
-                  <c:pt idx="662">
-                    <c:v/>
-                  </c:pt>
-                  <c:pt idx="663">
-                    <c:v/>
-                  </c:pt>
-                  <c:pt idx="664">
-                    <c:v/>
-                  </c:pt>
-                  <c:pt idx="665">
-                    <c:v/>
-                  </c:pt>
-                  <c:pt idx="666">
-                    <c:v/>
-                  </c:pt>
-                  <c:pt idx="667">
-                    <c:v/>
-                  </c:pt>
-                  <c:pt idx="668">
-                    <c:v/>
-                  </c:pt>
-                  <c:pt idx="669">
-                    <c:v/>
-                  </c:pt>
-                  <c:pt idx="670">
-                    <c:v/>
-                  </c:pt>
-                  <c:pt idx="671">
-                    <c:v/>
-                  </c:pt>
-                  <c:pt idx="672">
-                    <c:v/>
-                  </c:pt>
-                  <c:pt idx="673">
-                    <c:v/>
-                  </c:pt>
-                  <c:pt idx="674">
-                    <c:v/>
-                  </c:pt>
-                  <c:pt idx="675">
-                    <c:v/>
-                  </c:pt>
-                  <c:pt idx="676">
-                    <c:v/>
-                  </c:pt>
-                  <c:pt idx="677">
-                    <c:v/>
-                  </c:pt>
-                  <c:pt idx="678">
-                    <c:v/>
-                  </c:pt>
-                  <c:pt idx="679">
-                    <c:v/>
-                  </c:pt>
-                  <c:pt idx="680">
-                    <c:v/>
-                  </c:pt>
-                  <c:pt idx="681">
-                    <c:v/>
-                  </c:pt>
-                  <c:pt idx="682">
-                    <c:v/>
-                  </c:pt>
-                  <c:pt idx="683">
-                    <c:v/>
-                  </c:pt>
-                  <c:pt idx="684">
-                    <c:v/>
-                  </c:pt>
-                  <c:pt idx="685">
-                    <c:v/>
-                  </c:pt>
-                  <c:pt idx="686">
-                    <c:v/>
-                  </c:pt>
-                  <c:pt idx="687">
-                    <c:v/>
-                  </c:pt>
-                  <c:pt idx="688">
-                    <c:v/>
-                  </c:pt>
-                  <c:pt idx="689">
-                    <c:v/>
-                  </c:pt>
-                  <c:pt idx="690">
-                    <c:v/>
-                  </c:pt>
-                  <c:pt idx="691">
-                    <c:v/>
-                  </c:pt>
-                  <c:pt idx="692">
-                    <c:v/>
-                  </c:pt>
-                  <c:pt idx="693">
-                    <c:v/>
-                  </c:pt>
-                  <c:pt idx="694">
-                    <c:v/>
-                  </c:pt>
-                  <c:pt idx="695">
-                    <c:v/>
-                  </c:pt>
-                  <c:pt idx="696">
-                    <c:v/>
-                  </c:pt>
-                  <c:pt idx="697">
-                    <c:v/>
-                  </c:pt>
-                  <c:pt idx="698">
-                    <c:v/>
-                  </c:pt>
-                  <c:pt idx="699">
-                    <c:v/>
-                  </c:pt>
-                  <c:pt idx="700">
-                    <c:v/>
-                  </c:pt>
-                  <c:pt idx="701">
-                    <c:v/>
-                  </c:pt>
-                  <c:pt idx="702">
-                    <c:v/>
-                  </c:pt>
-                  <c:pt idx="703">
-                    <c:v/>
-                  </c:pt>
-                  <c:pt idx="704">
-                    <c:v/>
-                  </c:pt>
-                  <c:pt idx="705">
-                    <c:v/>
-                  </c:pt>
-                  <c:pt idx="706">
-                    <c:v/>
-                  </c:pt>
-                  <c:pt idx="707">
-                    <c:v/>
-                  </c:pt>
-                  <c:pt idx="708">
-                    <c:v/>
-                  </c:pt>
-                  <c:pt idx="709">
-                    <c:v/>
-                  </c:pt>
-                  <c:pt idx="710">
-                    <c:v/>
-                  </c:pt>
-                  <c:pt idx="711">
-                    <c:v/>
-                  </c:pt>
-                  <c:pt idx="712">
-                    <c:v/>
-                  </c:pt>
-                  <c:pt idx="713">
-                    <c:v/>
-                  </c:pt>
-                  <c:pt idx="714">
-                    <c:v/>
-                  </c:pt>
-                  <c:pt idx="715">
-                    <c:v/>
-                  </c:pt>
-                  <c:pt idx="716">
-                    <c:v/>
-                  </c:pt>
-                  <c:pt idx="717">
-                    <c:v/>
-                  </c:pt>
-                  <c:pt idx="718">
-                    <c:v/>
-                  </c:pt>
-                  <c:pt idx="719">
-                    <c:v/>
-                  </c:pt>
-                  <c:pt idx="720">
-                    <c:v/>
-                  </c:pt>
-                  <c:pt idx="721">
-                    <c:v/>
-                  </c:pt>
-                  <c:pt idx="722">
-                    <c:v/>
-                  </c:pt>
-                  <c:pt idx="723">
-                    <c:v/>
-                  </c:pt>
-                  <c:pt idx="724">
-                    <c:v/>
-                  </c:pt>
-                  <c:pt idx="725">
-                    <c:v/>
-                  </c:pt>
-                  <c:pt idx="726">
-                    <c:v/>
-                  </c:pt>
-                  <c:pt idx="727">
-                    <c:v/>
-                  </c:pt>
-                  <c:pt idx="728">
-                    <c:v/>
-                  </c:pt>
-                  <c:pt idx="729">
-                    <c:v/>
-                  </c:pt>
-                  <c:pt idx="730">
-                    <c:v/>
-                  </c:pt>
-                  <c:pt idx="731">
-                    <c:v/>
-                  </c:pt>
-                  <c:pt idx="732">
-                    <c:v/>
-                  </c:pt>
-                  <c:pt idx="733">
-                    <c:v/>
-                  </c:pt>
-                  <c:pt idx="734">
-                    <c:v/>
-                  </c:pt>
-                  <c:pt idx="735">
-                    <c:v/>
-                  </c:pt>
-                  <c:pt idx="736">
-                    <c:v/>
-                  </c:pt>
-                  <c:pt idx="737">
-                    <c:v/>
-                  </c:pt>
-                  <c:pt idx="738">
-                    <c:v/>
-                  </c:pt>
-                  <c:pt idx="739">
-                    <c:v/>
-                  </c:pt>
-                  <c:pt idx="740">
-                    <c:v/>
-                  </c:pt>
-                  <c:pt idx="741">
-                    <c:v/>
-                  </c:pt>
-                  <c:pt idx="742">
-                    <c:v/>
-                  </c:pt>
-                  <c:pt idx="743">
-                    <c:v/>
-                  </c:pt>
-                  <c:pt idx="744">
-                    <c:v/>
-                  </c:pt>
-                  <c:pt idx="745">
-                    <c:v/>
-                  </c:pt>
-                  <c:pt idx="746">
-                    <c:v/>
-                  </c:pt>
-                  <c:pt idx="747">
-                    <c:v/>
-                  </c:pt>
-                  <c:pt idx="748">
-                    <c:v/>
-                  </c:pt>
-                  <c:pt idx="749">
-                    <c:v/>
-                  </c:pt>
-                  <c:pt idx="750">
-                    <c:v/>
-                  </c:pt>
-                  <c:pt idx="751">
-                    <c:v/>
-                  </c:pt>
-                  <c:pt idx="752">
-                    <c:v/>
-                  </c:pt>
-                  <c:pt idx="753">
-                    <c:v/>
-                  </c:pt>
-                  <c:pt idx="754">
-                    <c:v/>
-                  </c:pt>
-                  <c:pt idx="755">
-                    <c:v/>
-                  </c:pt>
-                  <c:pt idx="756">
-                    <c:v/>
-                  </c:pt>
-                  <c:pt idx="757">
-                    <c:v/>
-                  </c:pt>
-                  <c:pt idx="758">
-                    <c:v/>
-                  </c:pt>
-                  <c:pt idx="759">
-                    <c:v/>
-                  </c:pt>
-                  <c:pt idx="760">
-                    <c:v/>
-                  </c:pt>
-                  <c:pt idx="761">
-                    <c:v/>
-                  </c:pt>
-                  <c:pt idx="762">
-                    <c:v/>
-                  </c:pt>
-                  <c:pt idx="763">
-                    <c:v/>
-                  </c:pt>
-                  <c:pt idx="764">
-                    <c:v/>
-                  </c:pt>
-                  <c:pt idx="765">
-                    <c:v/>
-                  </c:pt>
-                  <c:pt idx="766">
-                    <c:v/>
-                  </c:pt>
-                  <c:pt idx="767">
-                    <c:v/>
-                  </c:pt>
-                  <c:pt idx="768">
-                    <c:v/>
-                  </c:pt>
-                  <c:pt idx="769">
-                    <c:v/>
-                  </c:pt>
-                  <c:pt idx="770">
-                    <c:v/>
-                  </c:pt>
-                  <c:pt idx="771">
-                    <c:v/>
-                  </c:pt>
-                  <c:pt idx="772">
-                    <c:v/>
-                  </c:pt>
-                  <c:pt idx="773">
-                    <c:v/>
-                  </c:pt>
-                  <c:pt idx="774">
-                    <c:v/>
-                  </c:pt>
-                  <c:pt idx="775">
-                    <c:v/>
-                  </c:pt>
-                  <c:pt idx="776">
-                    <c:v/>
-                  </c:pt>
-                  <c:pt idx="777">
-                    <c:v/>
-                  </c:pt>
-                  <c:pt idx="778">
-                    <c:v/>
-                  </c:pt>
-                  <c:pt idx="779">
-                    <c:v/>
-                  </c:pt>
-                  <c:pt idx="780">
-                    <c:v/>
-                  </c:pt>
-                  <c:pt idx="781">
-                    <c:v/>
-                  </c:pt>
-                  <c:pt idx="782">
-                    <c:v/>
-                  </c:pt>
-                  <c:pt idx="783">
-                    <c:v/>
-                  </c:pt>
-                  <c:pt idx="784">
-                    <c:v/>
-                  </c:pt>
-                  <c:pt idx="785">
-                    <c:v/>
-                  </c:pt>
-                  <c:pt idx="786">
-                    <c:v/>
-                  </c:pt>
-                  <c:pt idx="787">
-                    <c:v/>
-                  </c:pt>
-                  <c:pt idx="788">
-                    <c:v/>
-                  </c:pt>
-                  <c:pt idx="789">
-                    <c:v/>
-                  </c:pt>
-                  <c:pt idx="790">
-                    <c:v/>
-                  </c:pt>
-                  <c:pt idx="791">
-                    <c:v/>
-                  </c:pt>
-                  <c:pt idx="792">
-                    <c:v/>
-                  </c:pt>
-                  <c:pt idx="793">
-                    <c:v/>
-                  </c:pt>
-                  <c:pt idx="794">
-                    <c:v/>
-                  </c:pt>
-                  <c:pt idx="795">
-                    <c:v/>
-                  </c:pt>
-                  <c:pt idx="796">
-                    <c:v/>
-                  </c:pt>
-                  <c:pt idx="797">
-                    <c:v/>
-                  </c:pt>
-                  <c:pt idx="798">
-                    <c:v/>
-                  </c:pt>
-                  <c:pt idx="799">
-                    <c:v/>
-                  </c:pt>
-                  <c:pt idx="800">
-                    <c:v/>
-                  </c:pt>
-                  <c:pt idx="801">
-                    <c:v/>
-                  </c:pt>
-                  <c:pt idx="802">
-                    <c:v/>
-                  </c:pt>
-                  <c:pt idx="803">
-                    <c:v/>
-                  </c:pt>
-                  <c:pt idx="804">
-                    <c:v/>
-                  </c:pt>
-                  <c:pt idx="805">
-                    <c:v/>
-                  </c:pt>
-                  <c:pt idx="806">
-                    <c:v/>
-                  </c:pt>
-                  <c:pt idx="807">
-                    <c:v/>
-                  </c:pt>
-                  <c:pt idx="808">
-                    <c:v/>
-                  </c:pt>
-                  <c:pt idx="809">
-                    <c:v/>
-                  </c:pt>
-                  <c:pt idx="810">
-                    <c:v/>
-                  </c:pt>
-                  <c:pt idx="811">
-                    <c:v/>
-                  </c:pt>
-                  <c:pt idx="812">
-                    <c:v/>
-                  </c:pt>
-                  <c:pt idx="813">
-                    <c:v/>
-                  </c:pt>
-                  <c:pt idx="814">
-                    <c:v/>
-                  </c:pt>
-                  <c:pt idx="815">
-                    <c:v/>
-                  </c:pt>
-                  <c:pt idx="816">
-                    <c:v/>
-                  </c:pt>
-                  <c:pt idx="817">
-                    <c:v/>
-                  </c:pt>
-                  <c:pt idx="818">
-                    <c:v/>
-                  </c:pt>
-                  <c:pt idx="819">
-                    <c:v/>
-                  </c:pt>
-                  <c:pt idx="820">
-                    <c:v/>
-                  </c:pt>
-                  <c:pt idx="821">
-                    <c:v/>
-                  </c:pt>
-                  <c:pt idx="822">
-                    <c:v/>
-                  </c:pt>
-                  <c:pt idx="823">
-                    <c:v/>
-                  </c:pt>
-                  <c:pt idx="824">
-                    <c:v/>
-                  </c:pt>
-                  <c:pt idx="825">
-                    <c:v/>
-                  </c:pt>
-                  <c:pt idx="826">
-                    <c:v/>
-                  </c:pt>
-                  <c:pt idx="827">
-                    <c:v/>
-                  </c:pt>
-                  <c:pt idx="828">
-                    <c:v/>
-                  </c:pt>
-                  <c:pt idx="829">
-                    <c:v/>
-                  </c:pt>
-                  <c:pt idx="830">
-                    <c:v/>
-                  </c:pt>
-                  <c:pt idx="831">
-                    <c:v/>
-                  </c:pt>
-                  <c:pt idx="832">
-                    <c:v/>
-                  </c:pt>
-                  <c:pt idx="833">
-                    <c:v/>
-                  </c:pt>
-                  <c:pt idx="834">
-                    <c:v/>
-                  </c:pt>
-                  <c:pt idx="835">
-                    <c:v/>
-                  </c:pt>
-                  <c:pt idx="836">
-                    <c:v/>
-                  </c:pt>
-                  <c:pt idx="837">
-                    <c:v/>
-                  </c:pt>
-                  <c:pt idx="838">
-                    <c:v/>
-                  </c:pt>
-                  <c:pt idx="839">
-                    <c:v/>
-                  </c:pt>
-                  <c:pt idx="840">
-                    <c:v/>
-                  </c:pt>
-                  <c:pt idx="841">
-                    <c:v/>
-                  </c:pt>
-                  <c:pt idx="842">
-                    <c:v/>
-                  </c:pt>
-                  <c:pt idx="843">
-                    <c:v/>
-                  </c:pt>
-                  <c:pt idx="844">
-                    <c:v/>
-                  </c:pt>
-                  <c:pt idx="845">
-                    <c:v/>
-                  </c:pt>
-                  <c:pt idx="846">
-                    <c:v/>
-                  </c:pt>
-                  <c:pt idx="847">
-                    <c:v/>
-                  </c:pt>
-                  <c:pt idx="848">
-                    <c:v/>
-                  </c:pt>
-                  <c:pt idx="849">
-                    <c:v/>
-                  </c:pt>
-                  <c:pt idx="850">
-                    <c:v/>
-                  </c:pt>
-                  <c:pt idx="851">
-                    <c:v/>
-                  </c:pt>
-                  <c:pt idx="852">
-                    <c:v/>
-                  </c:pt>
-                  <c:pt idx="853">
-                    <c:v/>
-                  </c:pt>
-                  <c:pt idx="854">
-                    <c:v/>
-                  </c:pt>
-                  <c:pt idx="855">
-                    <c:v/>
-                  </c:pt>
-                  <c:pt idx="856">
-                    <c:v/>
-                  </c:pt>
-                  <c:pt idx="857">
-                    <c:v/>
-                  </c:pt>
-                  <c:pt idx="858">
-                    <c:v/>
-                  </c:pt>
-                  <c:pt idx="859">
-                    <c:v/>
-                  </c:pt>
-                  <c:pt idx="860">
-                    <c:v/>
-                  </c:pt>
-                  <c:pt idx="861">
-                    <c:v/>
-                  </c:pt>
-                  <c:pt idx="862">
-                    <c:v/>
-                  </c:pt>
-                  <c:pt idx="863">
-                    <c:v/>
                   </c:pt>
                 </c:lvl>
               </c:multiLvlStrCache>
@@ -35310,45 +30228,6 @@
                 </c:pt>
                 <c:pt idx="460">
                   <c:v>2.457</c:v>
-                </c:pt>
-                <c:pt idx="461">
-                  <c:v/>
-                </c:pt>
-                <c:pt idx="462">
-                  <c:v/>
-                </c:pt>
-                <c:pt idx="463">
-                  <c:v/>
-                </c:pt>
-                <c:pt idx="464">
-                  <c:v/>
-                </c:pt>
-                <c:pt idx="465">
-                  <c:v/>
-                </c:pt>
-                <c:pt idx="466">
-                  <c:v/>
-                </c:pt>
-                <c:pt idx="467">
-                  <c:v/>
-                </c:pt>
-                <c:pt idx="468">
-                  <c:v/>
-                </c:pt>
-                <c:pt idx="469">
-                  <c:v/>
-                </c:pt>
-                <c:pt idx="470">
-                  <c:v/>
-                </c:pt>
-                <c:pt idx="471">
-                  <c:v/>
-                </c:pt>
-                <c:pt idx="472">
-                  <c:v/>
-                </c:pt>
-                <c:pt idx="473">
-                  <c:v/>
                 </c:pt>
                 <c:pt idx="474">
                   <c:v>2.106</c:v>
@@ -36603,2594 +31482,11 @@
                   <c:pt idx="0">
                     <c:v>21/02</c:v>
                   </c:pt>
-                  <c:pt idx="1">
-                    <c:v/>
-                  </c:pt>
-                  <c:pt idx="2">
-                    <c:v/>
-                  </c:pt>
-                  <c:pt idx="3">
-                    <c:v/>
-                  </c:pt>
-                  <c:pt idx="4">
-                    <c:v/>
-                  </c:pt>
-                  <c:pt idx="5">
-                    <c:v/>
-                  </c:pt>
-                  <c:pt idx="6">
-                    <c:v/>
-                  </c:pt>
-                  <c:pt idx="7">
-                    <c:v/>
-                  </c:pt>
-                  <c:pt idx="8">
-                    <c:v/>
-                  </c:pt>
-                  <c:pt idx="9">
-                    <c:v/>
-                  </c:pt>
-                  <c:pt idx="10">
-                    <c:v/>
-                  </c:pt>
-                  <c:pt idx="11">
-                    <c:v/>
-                  </c:pt>
-                  <c:pt idx="12">
-                    <c:v/>
-                  </c:pt>
-                  <c:pt idx="13">
-                    <c:v/>
-                  </c:pt>
-                  <c:pt idx="14">
-                    <c:v/>
-                  </c:pt>
-                  <c:pt idx="15">
-                    <c:v/>
-                  </c:pt>
-                  <c:pt idx="16">
-                    <c:v/>
-                  </c:pt>
-                  <c:pt idx="17">
-                    <c:v/>
-                  </c:pt>
-                  <c:pt idx="18">
-                    <c:v/>
-                  </c:pt>
-                  <c:pt idx="19">
-                    <c:v/>
-                  </c:pt>
-                  <c:pt idx="20">
-                    <c:v/>
-                  </c:pt>
-                  <c:pt idx="21">
-                    <c:v/>
-                  </c:pt>
-                  <c:pt idx="22">
-                    <c:v/>
-                  </c:pt>
-                  <c:pt idx="23">
-                    <c:v/>
-                  </c:pt>
-                  <c:pt idx="24">
-                    <c:v/>
-                  </c:pt>
-                  <c:pt idx="25">
-                    <c:v/>
-                  </c:pt>
-                  <c:pt idx="26">
-                    <c:v/>
-                  </c:pt>
-                  <c:pt idx="27">
-                    <c:v/>
-                  </c:pt>
-                  <c:pt idx="28">
-                    <c:v/>
-                  </c:pt>
-                  <c:pt idx="29">
-                    <c:v/>
-                  </c:pt>
-                  <c:pt idx="30">
-                    <c:v/>
-                  </c:pt>
-                  <c:pt idx="31">
-                    <c:v/>
-                  </c:pt>
-                  <c:pt idx="32">
-                    <c:v/>
-                  </c:pt>
-                  <c:pt idx="33">
-                    <c:v/>
-                  </c:pt>
-                  <c:pt idx="34">
-                    <c:v/>
-                  </c:pt>
-                  <c:pt idx="35">
-                    <c:v/>
-                  </c:pt>
-                  <c:pt idx="36">
-                    <c:v/>
-                  </c:pt>
-                  <c:pt idx="37">
-                    <c:v/>
-                  </c:pt>
-                  <c:pt idx="38">
-                    <c:v/>
-                  </c:pt>
-                  <c:pt idx="39">
-                    <c:v/>
-                  </c:pt>
-                  <c:pt idx="40">
-                    <c:v/>
-                  </c:pt>
-                  <c:pt idx="41">
-                    <c:v/>
-                  </c:pt>
-                  <c:pt idx="42">
-                    <c:v/>
-                  </c:pt>
-                  <c:pt idx="43">
-                    <c:v/>
-                  </c:pt>
-                  <c:pt idx="44">
-                    <c:v/>
-                  </c:pt>
-                  <c:pt idx="45">
-                    <c:v/>
-                  </c:pt>
-                  <c:pt idx="46">
-                    <c:v/>
-                  </c:pt>
-                  <c:pt idx="47">
-                    <c:v/>
-                  </c:pt>
-                  <c:pt idx="48">
-                    <c:v/>
-                  </c:pt>
-                  <c:pt idx="49">
-                    <c:v/>
-                  </c:pt>
-                  <c:pt idx="50">
-                    <c:v/>
-                  </c:pt>
-                  <c:pt idx="51">
-                    <c:v/>
-                  </c:pt>
-                  <c:pt idx="52">
-                    <c:v/>
-                  </c:pt>
-                  <c:pt idx="53">
-                    <c:v/>
-                  </c:pt>
-                  <c:pt idx="54">
-                    <c:v/>
-                  </c:pt>
-                  <c:pt idx="55">
-                    <c:v/>
-                  </c:pt>
-                  <c:pt idx="56">
-                    <c:v/>
-                  </c:pt>
-                  <c:pt idx="57">
-                    <c:v/>
-                  </c:pt>
-                  <c:pt idx="58">
-                    <c:v/>
-                  </c:pt>
-                  <c:pt idx="59">
-                    <c:v/>
-                  </c:pt>
-                  <c:pt idx="60">
-                    <c:v/>
-                  </c:pt>
-                  <c:pt idx="61">
-                    <c:v/>
-                  </c:pt>
-                  <c:pt idx="62">
-                    <c:v/>
-                  </c:pt>
-                  <c:pt idx="63">
-                    <c:v/>
-                  </c:pt>
-                  <c:pt idx="64">
-                    <c:v/>
-                  </c:pt>
-                  <c:pt idx="65">
-                    <c:v/>
-                  </c:pt>
-                  <c:pt idx="66">
-                    <c:v/>
-                  </c:pt>
-                  <c:pt idx="67">
-                    <c:v/>
-                  </c:pt>
-                  <c:pt idx="68">
-                    <c:v/>
-                  </c:pt>
-                  <c:pt idx="69">
-                    <c:v/>
-                  </c:pt>
-                  <c:pt idx="70">
-                    <c:v/>
-                  </c:pt>
-                  <c:pt idx="71">
-                    <c:v/>
-                  </c:pt>
-                  <c:pt idx="72">
-                    <c:v/>
-                  </c:pt>
-                  <c:pt idx="73">
-                    <c:v/>
-                  </c:pt>
-                  <c:pt idx="74">
-                    <c:v/>
-                  </c:pt>
-                  <c:pt idx="75">
-                    <c:v/>
-                  </c:pt>
-                  <c:pt idx="76">
-                    <c:v/>
-                  </c:pt>
-                  <c:pt idx="77">
-                    <c:v/>
-                  </c:pt>
-                  <c:pt idx="78">
-                    <c:v/>
-                  </c:pt>
-                  <c:pt idx="79">
-                    <c:v/>
-                  </c:pt>
-                  <c:pt idx="80">
-                    <c:v/>
-                  </c:pt>
-                  <c:pt idx="81">
-                    <c:v/>
-                  </c:pt>
-                  <c:pt idx="82">
-                    <c:v/>
-                  </c:pt>
-                  <c:pt idx="83">
-                    <c:v/>
-                  </c:pt>
-                  <c:pt idx="84">
-                    <c:v/>
-                  </c:pt>
-                  <c:pt idx="85">
-                    <c:v/>
-                  </c:pt>
-                  <c:pt idx="86">
-                    <c:v/>
-                  </c:pt>
-                  <c:pt idx="87">
-                    <c:v/>
-                  </c:pt>
-                  <c:pt idx="88">
-                    <c:v/>
-                  </c:pt>
-                  <c:pt idx="89">
-                    <c:v/>
-                  </c:pt>
-                  <c:pt idx="90">
-                    <c:v/>
-                  </c:pt>
-                  <c:pt idx="91">
-                    <c:v/>
-                  </c:pt>
-                  <c:pt idx="92">
-                    <c:v/>
-                  </c:pt>
-                  <c:pt idx="93">
-                    <c:v/>
-                  </c:pt>
-                  <c:pt idx="94">
-                    <c:v/>
-                  </c:pt>
-                  <c:pt idx="95">
-                    <c:v/>
-                  </c:pt>
-                  <c:pt idx="96">
-                    <c:v/>
-                  </c:pt>
-                  <c:pt idx="97">
-                    <c:v/>
-                  </c:pt>
-                  <c:pt idx="98">
-                    <c:v/>
-                  </c:pt>
-                  <c:pt idx="99">
-                    <c:v/>
-                  </c:pt>
-                  <c:pt idx="100">
-                    <c:v/>
-                  </c:pt>
-                  <c:pt idx="101">
-                    <c:v/>
-                  </c:pt>
-                  <c:pt idx="102">
-                    <c:v/>
-                  </c:pt>
-                  <c:pt idx="103">
-                    <c:v/>
-                  </c:pt>
-                  <c:pt idx="104">
-                    <c:v/>
-                  </c:pt>
-                  <c:pt idx="105">
-                    <c:v/>
-                  </c:pt>
-                  <c:pt idx="106">
-                    <c:v/>
-                  </c:pt>
-                  <c:pt idx="107">
-                    <c:v/>
-                  </c:pt>
-                  <c:pt idx="108">
-                    <c:v/>
-                  </c:pt>
-                  <c:pt idx="109">
-                    <c:v/>
-                  </c:pt>
-                  <c:pt idx="110">
-                    <c:v/>
-                  </c:pt>
-                  <c:pt idx="111">
-                    <c:v/>
-                  </c:pt>
-                  <c:pt idx="112">
-                    <c:v/>
-                  </c:pt>
-                  <c:pt idx="113">
-                    <c:v/>
-                  </c:pt>
-                  <c:pt idx="114">
-                    <c:v/>
-                  </c:pt>
-                  <c:pt idx="115">
-                    <c:v/>
-                  </c:pt>
-                  <c:pt idx="116">
-                    <c:v/>
-                  </c:pt>
-                  <c:pt idx="117">
-                    <c:v/>
-                  </c:pt>
-                  <c:pt idx="118">
-                    <c:v/>
-                  </c:pt>
-                  <c:pt idx="119">
-                    <c:v/>
-                  </c:pt>
-                  <c:pt idx="120">
-                    <c:v/>
-                  </c:pt>
-                  <c:pt idx="121">
-                    <c:v/>
-                  </c:pt>
-                  <c:pt idx="122">
-                    <c:v/>
-                  </c:pt>
-                  <c:pt idx="123">
-                    <c:v/>
-                  </c:pt>
-                  <c:pt idx="124">
-                    <c:v/>
-                  </c:pt>
-                  <c:pt idx="125">
-                    <c:v/>
-                  </c:pt>
-                  <c:pt idx="126">
-                    <c:v/>
-                  </c:pt>
-                  <c:pt idx="127">
-                    <c:v/>
-                  </c:pt>
-                  <c:pt idx="128">
-                    <c:v/>
-                  </c:pt>
-                  <c:pt idx="129">
-                    <c:v/>
-                  </c:pt>
-                  <c:pt idx="130">
-                    <c:v/>
-                  </c:pt>
-                  <c:pt idx="131">
-                    <c:v/>
-                  </c:pt>
-                  <c:pt idx="132">
-                    <c:v/>
-                  </c:pt>
-                  <c:pt idx="133">
-                    <c:v/>
-                  </c:pt>
-                  <c:pt idx="134">
-                    <c:v/>
-                  </c:pt>
-                  <c:pt idx="135">
-                    <c:v/>
-                  </c:pt>
-                  <c:pt idx="136">
-                    <c:v/>
-                  </c:pt>
-                  <c:pt idx="137">
-                    <c:v/>
-                  </c:pt>
-                  <c:pt idx="138">
-                    <c:v/>
-                  </c:pt>
-                  <c:pt idx="139">
-                    <c:v/>
-                  </c:pt>
-                  <c:pt idx="140">
-                    <c:v/>
-                  </c:pt>
-                  <c:pt idx="141">
-                    <c:v/>
-                  </c:pt>
-                  <c:pt idx="142">
-                    <c:v/>
-                  </c:pt>
-                  <c:pt idx="143">
-                    <c:v/>
-                  </c:pt>
-                  <c:pt idx="144">
-                    <c:v/>
-                  </c:pt>
-                  <c:pt idx="145">
-                    <c:v/>
-                  </c:pt>
-                  <c:pt idx="146">
-                    <c:v/>
-                  </c:pt>
-                  <c:pt idx="147">
-                    <c:v/>
-                  </c:pt>
-                  <c:pt idx="148">
-                    <c:v/>
-                  </c:pt>
-                  <c:pt idx="149">
-                    <c:v/>
-                  </c:pt>
-                  <c:pt idx="150">
-                    <c:v/>
-                  </c:pt>
-                  <c:pt idx="151">
-                    <c:v/>
-                  </c:pt>
-                  <c:pt idx="152">
-                    <c:v/>
-                  </c:pt>
-                  <c:pt idx="153">
-                    <c:v/>
-                  </c:pt>
-                  <c:pt idx="154">
-                    <c:v/>
-                  </c:pt>
-                  <c:pt idx="155">
-                    <c:v/>
-                  </c:pt>
-                  <c:pt idx="156">
-                    <c:v/>
-                  </c:pt>
-                  <c:pt idx="157">
-                    <c:v/>
-                  </c:pt>
-                  <c:pt idx="158">
-                    <c:v/>
-                  </c:pt>
-                  <c:pt idx="159">
-                    <c:v/>
-                  </c:pt>
-                  <c:pt idx="160">
-                    <c:v/>
-                  </c:pt>
-                  <c:pt idx="161">
-                    <c:v/>
-                  </c:pt>
-                  <c:pt idx="162">
-                    <c:v/>
-                  </c:pt>
-                  <c:pt idx="163">
-                    <c:v/>
-                  </c:pt>
-                  <c:pt idx="164">
-                    <c:v/>
-                  </c:pt>
-                  <c:pt idx="165">
-                    <c:v/>
-                  </c:pt>
-                  <c:pt idx="166">
-                    <c:v/>
-                  </c:pt>
-                  <c:pt idx="167">
-                    <c:v/>
-                  </c:pt>
-                  <c:pt idx="168">
-                    <c:v/>
-                  </c:pt>
-                  <c:pt idx="169">
-                    <c:v/>
-                  </c:pt>
-                  <c:pt idx="170">
-                    <c:v/>
-                  </c:pt>
-                  <c:pt idx="171">
-                    <c:v/>
-                  </c:pt>
-                  <c:pt idx="172">
-                    <c:v/>
-                  </c:pt>
-                  <c:pt idx="173">
-                    <c:v/>
-                  </c:pt>
-                  <c:pt idx="174">
-                    <c:v/>
-                  </c:pt>
-                  <c:pt idx="175">
-                    <c:v/>
-                  </c:pt>
-                  <c:pt idx="176">
-                    <c:v/>
-                  </c:pt>
-                  <c:pt idx="177">
-                    <c:v/>
-                  </c:pt>
-                  <c:pt idx="178">
-                    <c:v/>
-                  </c:pt>
-                  <c:pt idx="179">
-                    <c:v/>
-                  </c:pt>
-                  <c:pt idx="180">
-                    <c:v/>
-                  </c:pt>
-                  <c:pt idx="181">
-                    <c:v/>
-                  </c:pt>
-                  <c:pt idx="182">
-                    <c:v/>
-                  </c:pt>
-                  <c:pt idx="183">
-                    <c:v/>
-                  </c:pt>
-                  <c:pt idx="184">
-                    <c:v/>
-                  </c:pt>
-                  <c:pt idx="185">
-                    <c:v/>
-                  </c:pt>
-                  <c:pt idx="186">
-                    <c:v/>
-                  </c:pt>
-                  <c:pt idx="187">
-                    <c:v/>
-                  </c:pt>
-                  <c:pt idx="188">
-                    <c:v/>
-                  </c:pt>
-                  <c:pt idx="189">
-                    <c:v/>
-                  </c:pt>
-                  <c:pt idx="190">
-                    <c:v/>
-                  </c:pt>
-                  <c:pt idx="191">
-                    <c:v/>
-                  </c:pt>
-                  <c:pt idx="192">
-                    <c:v/>
-                  </c:pt>
-                  <c:pt idx="193">
-                    <c:v/>
-                  </c:pt>
-                  <c:pt idx="194">
-                    <c:v/>
-                  </c:pt>
-                  <c:pt idx="195">
-                    <c:v/>
-                  </c:pt>
-                  <c:pt idx="196">
-                    <c:v/>
-                  </c:pt>
-                  <c:pt idx="197">
-                    <c:v/>
-                  </c:pt>
-                  <c:pt idx="198">
-                    <c:v/>
-                  </c:pt>
-                  <c:pt idx="199">
-                    <c:v/>
-                  </c:pt>
-                  <c:pt idx="200">
-                    <c:v/>
-                  </c:pt>
-                  <c:pt idx="201">
-                    <c:v/>
-                  </c:pt>
-                  <c:pt idx="202">
-                    <c:v/>
-                  </c:pt>
-                  <c:pt idx="203">
-                    <c:v/>
-                  </c:pt>
-                  <c:pt idx="204">
-                    <c:v/>
-                  </c:pt>
-                  <c:pt idx="205">
-                    <c:v/>
-                  </c:pt>
-                  <c:pt idx="206">
-                    <c:v/>
-                  </c:pt>
-                  <c:pt idx="207">
-                    <c:v/>
-                  </c:pt>
-                  <c:pt idx="208">
-                    <c:v/>
-                  </c:pt>
-                  <c:pt idx="209">
-                    <c:v/>
-                  </c:pt>
-                  <c:pt idx="210">
-                    <c:v/>
-                  </c:pt>
-                  <c:pt idx="211">
-                    <c:v/>
-                  </c:pt>
-                  <c:pt idx="212">
-                    <c:v/>
-                  </c:pt>
-                  <c:pt idx="213">
-                    <c:v/>
-                  </c:pt>
-                  <c:pt idx="214">
-                    <c:v/>
-                  </c:pt>
-                  <c:pt idx="215">
-                    <c:v/>
-                  </c:pt>
-                  <c:pt idx="216">
-                    <c:v/>
-                  </c:pt>
-                  <c:pt idx="217">
-                    <c:v/>
-                  </c:pt>
-                  <c:pt idx="218">
-                    <c:v/>
-                  </c:pt>
-                  <c:pt idx="219">
-                    <c:v/>
-                  </c:pt>
-                  <c:pt idx="220">
-                    <c:v/>
-                  </c:pt>
-                  <c:pt idx="221">
-                    <c:v/>
-                  </c:pt>
-                  <c:pt idx="222">
-                    <c:v/>
-                  </c:pt>
-                  <c:pt idx="223">
-                    <c:v/>
-                  </c:pt>
-                  <c:pt idx="224">
-                    <c:v/>
-                  </c:pt>
-                  <c:pt idx="225">
-                    <c:v/>
-                  </c:pt>
-                  <c:pt idx="226">
-                    <c:v/>
-                  </c:pt>
-                  <c:pt idx="227">
-                    <c:v/>
-                  </c:pt>
-                  <c:pt idx="228">
-                    <c:v/>
-                  </c:pt>
-                  <c:pt idx="229">
-                    <c:v/>
-                  </c:pt>
-                  <c:pt idx="230">
-                    <c:v/>
-                  </c:pt>
-                  <c:pt idx="231">
-                    <c:v/>
-                  </c:pt>
-                  <c:pt idx="232">
-                    <c:v/>
-                  </c:pt>
-                  <c:pt idx="233">
-                    <c:v/>
-                  </c:pt>
-                  <c:pt idx="234">
-                    <c:v/>
-                  </c:pt>
-                  <c:pt idx="235">
-                    <c:v/>
-                  </c:pt>
-                  <c:pt idx="236">
-                    <c:v/>
-                  </c:pt>
-                  <c:pt idx="237">
-                    <c:v/>
-                  </c:pt>
-                  <c:pt idx="238">
-                    <c:v/>
-                  </c:pt>
-                  <c:pt idx="239">
-                    <c:v/>
-                  </c:pt>
-                  <c:pt idx="240">
-                    <c:v/>
-                  </c:pt>
-                  <c:pt idx="241">
-                    <c:v/>
-                  </c:pt>
-                  <c:pt idx="242">
-                    <c:v/>
-                  </c:pt>
-                  <c:pt idx="243">
-                    <c:v/>
-                  </c:pt>
-                  <c:pt idx="244">
-                    <c:v/>
-                  </c:pt>
-                  <c:pt idx="245">
-                    <c:v/>
-                  </c:pt>
-                  <c:pt idx="246">
-                    <c:v/>
-                  </c:pt>
-                  <c:pt idx="247">
-                    <c:v/>
-                  </c:pt>
-                  <c:pt idx="248">
-                    <c:v/>
-                  </c:pt>
-                  <c:pt idx="249">
-                    <c:v/>
-                  </c:pt>
-                  <c:pt idx="250">
-                    <c:v/>
-                  </c:pt>
-                  <c:pt idx="251">
-                    <c:v/>
-                  </c:pt>
-                  <c:pt idx="252">
-                    <c:v/>
-                  </c:pt>
-                  <c:pt idx="253">
-                    <c:v/>
-                  </c:pt>
-                  <c:pt idx="254">
-                    <c:v/>
-                  </c:pt>
-                  <c:pt idx="255">
-                    <c:v/>
-                  </c:pt>
-                  <c:pt idx="256">
-                    <c:v/>
-                  </c:pt>
-                  <c:pt idx="257">
-                    <c:v/>
-                  </c:pt>
-                  <c:pt idx="258">
-                    <c:v/>
-                  </c:pt>
-                  <c:pt idx="259">
-                    <c:v/>
-                  </c:pt>
-                  <c:pt idx="260">
-                    <c:v/>
-                  </c:pt>
-                  <c:pt idx="261">
-                    <c:v/>
-                  </c:pt>
-                  <c:pt idx="262">
-                    <c:v/>
-                  </c:pt>
-                  <c:pt idx="263">
-                    <c:v/>
-                  </c:pt>
-                  <c:pt idx="264">
-                    <c:v/>
-                  </c:pt>
-                  <c:pt idx="265">
-                    <c:v/>
-                  </c:pt>
-                  <c:pt idx="266">
-                    <c:v/>
-                  </c:pt>
-                  <c:pt idx="267">
-                    <c:v/>
-                  </c:pt>
-                  <c:pt idx="268">
-                    <c:v/>
-                  </c:pt>
-                  <c:pt idx="269">
-                    <c:v/>
-                  </c:pt>
-                  <c:pt idx="270">
-                    <c:v/>
-                  </c:pt>
-                  <c:pt idx="271">
-                    <c:v/>
-                  </c:pt>
-                  <c:pt idx="272">
-                    <c:v/>
-                  </c:pt>
-                  <c:pt idx="273">
-                    <c:v/>
-                  </c:pt>
-                  <c:pt idx="274">
-                    <c:v/>
-                  </c:pt>
-                  <c:pt idx="275">
-                    <c:v/>
-                  </c:pt>
-                  <c:pt idx="276">
-                    <c:v/>
-                  </c:pt>
-                  <c:pt idx="277">
-                    <c:v/>
-                  </c:pt>
-                  <c:pt idx="278">
-                    <c:v/>
-                  </c:pt>
-                  <c:pt idx="279">
-                    <c:v/>
-                  </c:pt>
-                  <c:pt idx="280">
-                    <c:v/>
-                  </c:pt>
-                  <c:pt idx="281">
-                    <c:v/>
-                  </c:pt>
-                  <c:pt idx="282">
-                    <c:v/>
-                  </c:pt>
-                  <c:pt idx="283">
-                    <c:v/>
-                  </c:pt>
-                  <c:pt idx="284">
-                    <c:v/>
-                  </c:pt>
-                  <c:pt idx="285">
-                    <c:v/>
-                  </c:pt>
-                  <c:pt idx="286">
-                    <c:v/>
-                  </c:pt>
-                  <c:pt idx="287">
-                    <c:v/>
-                  </c:pt>
                   <c:pt idx="288">
                     <c:v>22/02</c:v>
                   </c:pt>
-                  <c:pt idx="289">
-                    <c:v/>
-                  </c:pt>
-                  <c:pt idx="290">
-                    <c:v/>
-                  </c:pt>
-                  <c:pt idx="291">
-                    <c:v/>
-                  </c:pt>
-                  <c:pt idx="292">
-                    <c:v/>
-                  </c:pt>
-                  <c:pt idx="293">
-                    <c:v/>
-                  </c:pt>
-                  <c:pt idx="294">
-                    <c:v/>
-                  </c:pt>
-                  <c:pt idx="295">
-                    <c:v/>
-                  </c:pt>
-                  <c:pt idx="296">
-                    <c:v/>
-                  </c:pt>
-                  <c:pt idx="297">
-                    <c:v/>
-                  </c:pt>
-                  <c:pt idx="298">
-                    <c:v/>
-                  </c:pt>
-                  <c:pt idx="299">
-                    <c:v/>
-                  </c:pt>
-                  <c:pt idx="300">
-                    <c:v/>
-                  </c:pt>
-                  <c:pt idx="301">
-                    <c:v/>
-                  </c:pt>
-                  <c:pt idx="302">
-                    <c:v/>
-                  </c:pt>
-                  <c:pt idx="303">
-                    <c:v/>
-                  </c:pt>
-                  <c:pt idx="304">
-                    <c:v/>
-                  </c:pt>
-                  <c:pt idx="305">
-                    <c:v/>
-                  </c:pt>
-                  <c:pt idx="306">
-                    <c:v/>
-                  </c:pt>
-                  <c:pt idx="307">
-                    <c:v/>
-                  </c:pt>
-                  <c:pt idx="308">
-                    <c:v/>
-                  </c:pt>
-                  <c:pt idx="309">
-                    <c:v/>
-                  </c:pt>
-                  <c:pt idx="310">
-                    <c:v/>
-                  </c:pt>
-                  <c:pt idx="311">
-                    <c:v/>
-                  </c:pt>
-                  <c:pt idx="312">
-                    <c:v/>
-                  </c:pt>
-                  <c:pt idx="313">
-                    <c:v/>
-                  </c:pt>
-                  <c:pt idx="314">
-                    <c:v/>
-                  </c:pt>
-                  <c:pt idx="315">
-                    <c:v/>
-                  </c:pt>
-                  <c:pt idx="316">
-                    <c:v/>
-                  </c:pt>
-                  <c:pt idx="317">
-                    <c:v/>
-                  </c:pt>
-                  <c:pt idx="318">
-                    <c:v/>
-                  </c:pt>
-                  <c:pt idx="319">
-                    <c:v/>
-                  </c:pt>
-                  <c:pt idx="320">
-                    <c:v/>
-                  </c:pt>
-                  <c:pt idx="321">
-                    <c:v/>
-                  </c:pt>
-                  <c:pt idx="322">
-                    <c:v/>
-                  </c:pt>
-                  <c:pt idx="323">
-                    <c:v/>
-                  </c:pt>
-                  <c:pt idx="324">
-                    <c:v/>
-                  </c:pt>
-                  <c:pt idx="325">
-                    <c:v/>
-                  </c:pt>
-                  <c:pt idx="326">
-                    <c:v/>
-                  </c:pt>
-                  <c:pt idx="327">
-                    <c:v/>
-                  </c:pt>
-                  <c:pt idx="328">
-                    <c:v/>
-                  </c:pt>
-                  <c:pt idx="329">
-                    <c:v/>
-                  </c:pt>
-                  <c:pt idx="330">
-                    <c:v/>
-                  </c:pt>
-                  <c:pt idx="331">
-                    <c:v/>
-                  </c:pt>
-                  <c:pt idx="332">
-                    <c:v/>
-                  </c:pt>
-                  <c:pt idx="333">
-                    <c:v/>
-                  </c:pt>
-                  <c:pt idx="334">
-                    <c:v/>
-                  </c:pt>
-                  <c:pt idx="335">
-                    <c:v/>
-                  </c:pt>
-                  <c:pt idx="336">
-                    <c:v/>
-                  </c:pt>
-                  <c:pt idx="337">
-                    <c:v/>
-                  </c:pt>
-                  <c:pt idx="338">
-                    <c:v/>
-                  </c:pt>
-                  <c:pt idx="339">
-                    <c:v/>
-                  </c:pt>
-                  <c:pt idx="340">
-                    <c:v/>
-                  </c:pt>
-                  <c:pt idx="341">
-                    <c:v/>
-                  </c:pt>
-                  <c:pt idx="342">
-                    <c:v/>
-                  </c:pt>
-                  <c:pt idx="343">
-                    <c:v/>
-                  </c:pt>
-                  <c:pt idx="344">
-                    <c:v/>
-                  </c:pt>
-                  <c:pt idx="345">
-                    <c:v/>
-                  </c:pt>
-                  <c:pt idx="346">
-                    <c:v/>
-                  </c:pt>
-                  <c:pt idx="347">
-                    <c:v/>
-                  </c:pt>
-                  <c:pt idx="348">
-                    <c:v/>
-                  </c:pt>
-                  <c:pt idx="349">
-                    <c:v/>
-                  </c:pt>
-                  <c:pt idx="350">
-                    <c:v/>
-                  </c:pt>
-                  <c:pt idx="351">
-                    <c:v/>
-                  </c:pt>
-                  <c:pt idx="352">
-                    <c:v/>
-                  </c:pt>
-                  <c:pt idx="353">
-                    <c:v/>
-                  </c:pt>
-                  <c:pt idx="354">
-                    <c:v/>
-                  </c:pt>
-                  <c:pt idx="355">
-                    <c:v/>
-                  </c:pt>
-                  <c:pt idx="356">
-                    <c:v/>
-                  </c:pt>
-                  <c:pt idx="357">
-                    <c:v/>
-                  </c:pt>
-                  <c:pt idx="358">
-                    <c:v/>
-                  </c:pt>
-                  <c:pt idx="359">
-                    <c:v/>
-                  </c:pt>
-                  <c:pt idx="360">
-                    <c:v/>
-                  </c:pt>
-                  <c:pt idx="361">
-                    <c:v/>
-                  </c:pt>
-                  <c:pt idx="362">
-                    <c:v/>
-                  </c:pt>
-                  <c:pt idx="363">
-                    <c:v/>
-                  </c:pt>
-                  <c:pt idx="364">
-                    <c:v/>
-                  </c:pt>
-                  <c:pt idx="365">
-                    <c:v/>
-                  </c:pt>
-                  <c:pt idx="366">
-                    <c:v/>
-                  </c:pt>
-                  <c:pt idx="367">
-                    <c:v/>
-                  </c:pt>
-                  <c:pt idx="368">
-                    <c:v/>
-                  </c:pt>
-                  <c:pt idx="369">
-                    <c:v/>
-                  </c:pt>
-                  <c:pt idx="370">
-                    <c:v/>
-                  </c:pt>
-                  <c:pt idx="371">
-                    <c:v/>
-                  </c:pt>
-                  <c:pt idx="372">
-                    <c:v/>
-                  </c:pt>
-                  <c:pt idx="373">
-                    <c:v/>
-                  </c:pt>
-                  <c:pt idx="374">
-                    <c:v/>
-                  </c:pt>
-                  <c:pt idx="375">
-                    <c:v/>
-                  </c:pt>
-                  <c:pt idx="376">
-                    <c:v/>
-                  </c:pt>
-                  <c:pt idx="377">
-                    <c:v/>
-                  </c:pt>
-                  <c:pt idx="378">
-                    <c:v/>
-                  </c:pt>
-                  <c:pt idx="379">
-                    <c:v/>
-                  </c:pt>
-                  <c:pt idx="380">
-                    <c:v/>
-                  </c:pt>
-                  <c:pt idx="381">
-                    <c:v/>
-                  </c:pt>
-                  <c:pt idx="382">
-                    <c:v/>
-                  </c:pt>
-                  <c:pt idx="383">
-                    <c:v/>
-                  </c:pt>
-                  <c:pt idx="384">
-                    <c:v/>
-                  </c:pt>
-                  <c:pt idx="385">
-                    <c:v/>
-                  </c:pt>
-                  <c:pt idx="386">
-                    <c:v/>
-                  </c:pt>
-                  <c:pt idx="387">
-                    <c:v/>
-                  </c:pt>
-                  <c:pt idx="388">
-                    <c:v/>
-                  </c:pt>
-                  <c:pt idx="389">
-                    <c:v/>
-                  </c:pt>
-                  <c:pt idx="390">
-                    <c:v/>
-                  </c:pt>
-                  <c:pt idx="391">
-                    <c:v/>
-                  </c:pt>
-                  <c:pt idx="392">
-                    <c:v/>
-                  </c:pt>
-                  <c:pt idx="393">
-                    <c:v/>
-                  </c:pt>
-                  <c:pt idx="394">
-                    <c:v/>
-                  </c:pt>
-                  <c:pt idx="395">
-                    <c:v/>
-                  </c:pt>
-                  <c:pt idx="396">
-                    <c:v/>
-                  </c:pt>
-                  <c:pt idx="397">
-                    <c:v/>
-                  </c:pt>
-                  <c:pt idx="398">
-                    <c:v/>
-                  </c:pt>
-                  <c:pt idx="399">
-                    <c:v/>
-                  </c:pt>
-                  <c:pt idx="400">
-                    <c:v/>
-                  </c:pt>
-                  <c:pt idx="401">
-                    <c:v/>
-                  </c:pt>
-                  <c:pt idx="402">
-                    <c:v/>
-                  </c:pt>
-                  <c:pt idx="403">
-                    <c:v/>
-                  </c:pt>
-                  <c:pt idx="404">
-                    <c:v/>
-                  </c:pt>
-                  <c:pt idx="405">
-                    <c:v/>
-                  </c:pt>
-                  <c:pt idx="406">
-                    <c:v/>
-                  </c:pt>
-                  <c:pt idx="407">
-                    <c:v/>
-                  </c:pt>
-                  <c:pt idx="408">
-                    <c:v/>
-                  </c:pt>
-                  <c:pt idx="409">
-                    <c:v/>
-                  </c:pt>
-                  <c:pt idx="410">
-                    <c:v/>
-                  </c:pt>
-                  <c:pt idx="411">
-                    <c:v/>
-                  </c:pt>
-                  <c:pt idx="412">
-                    <c:v/>
-                  </c:pt>
-                  <c:pt idx="413">
-                    <c:v/>
-                  </c:pt>
-                  <c:pt idx="414">
-                    <c:v/>
-                  </c:pt>
-                  <c:pt idx="415">
-                    <c:v/>
-                  </c:pt>
-                  <c:pt idx="416">
-                    <c:v/>
-                  </c:pt>
-                  <c:pt idx="417">
-                    <c:v/>
-                  </c:pt>
-                  <c:pt idx="418">
-                    <c:v/>
-                  </c:pt>
-                  <c:pt idx="419">
-                    <c:v/>
-                  </c:pt>
-                  <c:pt idx="420">
-                    <c:v/>
-                  </c:pt>
-                  <c:pt idx="421">
-                    <c:v/>
-                  </c:pt>
-                  <c:pt idx="422">
-                    <c:v/>
-                  </c:pt>
-                  <c:pt idx="423">
-                    <c:v/>
-                  </c:pt>
-                  <c:pt idx="424">
-                    <c:v/>
-                  </c:pt>
-                  <c:pt idx="425">
-                    <c:v/>
-                  </c:pt>
-                  <c:pt idx="426">
-                    <c:v/>
-                  </c:pt>
-                  <c:pt idx="427">
-                    <c:v/>
-                  </c:pt>
-                  <c:pt idx="428">
-                    <c:v/>
-                  </c:pt>
-                  <c:pt idx="429">
-                    <c:v/>
-                  </c:pt>
-                  <c:pt idx="430">
-                    <c:v/>
-                  </c:pt>
-                  <c:pt idx="431">
-                    <c:v/>
-                  </c:pt>
-                  <c:pt idx="432">
-                    <c:v/>
-                  </c:pt>
-                  <c:pt idx="433">
-                    <c:v/>
-                  </c:pt>
-                  <c:pt idx="434">
-                    <c:v/>
-                  </c:pt>
-                  <c:pt idx="435">
-                    <c:v/>
-                  </c:pt>
-                  <c:pt idx="436">
-                    <c:v/>
-                  </c:pt>
-                  <c:pt idx="437">
-                    <c:v/>
-                  </c:pt>
-                  <c:pt idx="438">
-                    <c:v/>
-                  </c:pt>
-                  <c:pt idx="439">
-                    <c:v/>
-                  </c:pt>
-                  <c:pt idx="440">
-                    <c:v/>
-                  </c:pt>
-                  <c:pt idx="441">
-                    <c:v/>
-                  </c:pt>
-                  <c:pt idx="442">
-                    <c:v/>
-                  </c:pt>
-                  <c:pt idx="443">
-                    <c:v/>
-                  </c:pt>
-                  <c:pt idx="444">
-                    <c:v/>
-                  </c:pt>
-                  <c:pt idx="445">
-                    <c:v/>
-                  </c:pt>
-                  <c:pt idx="446">
-                    <c:v/>
-                  </c:pt>
-                  <c:pt idx="447">
-                    <c:v/>
-                  </c:pt>
-                  <c:pt idx="448">
-                    <c:v/>
-                  </c:pt>
-                  <c:pt idx="449">
-                    <c:v/>
-                  </c:pt>
-                  <c:pt idx="450">
-                    <c:v/>
-                  </c:pt>
-                  <c:pt idx="451">
-                    <c:v/>
-                  </c:pt>
-                  <c:pt idx="452">
-                    <c:v/>
-                  </c:pt>
-                  <c:pt idx="453">
-                    <c:v/>
-                  </c:pt>
-                  <c:pt idx="454">
-                    <c:v/>
-                  </c:pt>
-                  <c:pt idx="455">
-                    <c:v/>
-                  </c:pt>
-                  <c:pt idx="456">
-                    <c:v/>
-                  </c:pt>
-                  <c:pt idx="457">
-                    <c:v/>
-                  </c:pt>
-                  <c:pt idx="458">
-                    <c:v/>
-                  </c:pt>
-                  <c:pt idx="459">
-                    <c:v/>
-                  </c:pt>
-                  <c:pt idx="460">
-                    <c:v/>
-                  </c:pt>
-                  <c:pt idx="461">
-                    <c:v/>
-                  </c:pt>
-                  <c:pt idx="462">
-                    <c:v/>
-                  </c:pt>
-                  <c:pt idx="463">
-                    <c:v/>
-                  </c:pt>
-                  <c:pt idx="464">
-                    <c:v/>
-                  </c:pt>
-                  <c:pt idx="465">
-                    <c:v/>
-                  </c:pt>
-                  <c:pt idx="466">
-                    <c:v/>
-                  </c:pt>
-                  <c:pt idx="467">
-                    <c:v/>
-                  </c:pt>
-                  <c:pt idx="468">
-                    <c:v/>
-                  </c:pt>
-                  <c:pt idx="469">
-                    <c:v/>
-                  </c:pt>
-                  <c:pt idx="470">
-                    <c:v/>
-                  </c:pt>
-                  <c:pt idx="471">
-                    <c:v/>
-                  </c:pt>
-                  <c:pt idx="472">
-                    <c:v/>
-                  </c:pt>
-                  <c:pt idx="473">
-                    <c:v/>
-                  </c:pt>
-                  <c:pt idx="474">
-                    <c:v/>
-                  </c:pt>
-                  <c:pt idx="475">
-                    <c:v/>
-                  </c:pt>
-                  <c:pt idx="476">
-                    <c:v/>
-                  </c:pt>
-                  <c:pt idx="477">
-                    <c:v/>
-                  </c:pt>
-                  <c:pt idx="478">
-                    <c:v/>
-                  </c:pt>
-                  <c:pt idx="479">
-                    <c:v/>
-                  </c:pt>
-                  <c:pt idx="480">
-                    <c:v/>
-                  </c:pt>
-                  <c:pt idx="481">
-                    <c:v/>
-                  </c:pt>
-                  <c:pt idx="482">
-                    <c:v/>
-                  </c:pt>
-                  <c:pt idx="483">
-                    <c:v/>
-                  </c:pt>
-                  <c:pt idx="484">
-                    <c:v/>
-                  </c:pt>
-                  <c:pt idx="485">
-                    <c:v/>
-                  </c:pt>
-                  <c:pt idx="486">
-                    <c:v/>
-                  </c:pt>
-                  <c:pt idx="487">
-                    <c:v/>
-                  </c:pt>
-                  <c:pt idx="488">
-                    <c:v/>
-                  </c:pt>
-                  <c:pt idx="489">
-                    <c:v/>
-                  </c:pt>
-                  <c:pt idx="490">
-                    <c:v/>
-                  </c:pt>
-                  <c:pt idx="491">
-                    <c:v/>
-                  </c:pt>
-                  <c:pt idx="492">
-                    <c:v/>
-                  </c:pt>
-                  <c:pt idx="493">
-                    <c:v/>
-                  </c:pt>
-                  <c:pt idx="494">
-                    <c:v/>
-                  </c:pt>
-                  <c:pt idx="495">
-                    <c:v/>
-                  </c:pt>
-                  <c:pt idx="496">
-                    <c:v/>
-                  </c:pt>
-                  <c:pt idx="497">
-                    <c:v/>
-                  </c:pt>
-                  <c:pt idx="498">
-                    <c:v/>
-                  </c:pt>
-                  <c:pt idx="499">
-                    <c:v/>
-                  </c:pt>
-                  <c:pt idx="500">
-                    <c:v/>
-                  </c:pt>
-                  <c:pt idx="501">
-                    <c:v/>
-                  </c:pt>
-                  <c:pt idx="502">
-                    <c:v/>
-                  </c:pt>
-                  <c:pt idx="503">
-                    <c:v/>
-                  </c:pt>
-                  <c:pt idx="504">
-                    <c:v/>
-                  </c:pt>
-                  <c:pt idx="505">
-                    <c:v/>
-                  </c:pt>
-                  <c:pt idx="506">
-                    <c:v/>
-                  </c:pt>
-                  <c:pt idx="507">
-                    <c:v/>
-                  </c:pt>
-                  <c:pt idx="508">
-                    <c:v/>
-                  </c:pt>
-                  <c:pt idx="509">
-                    <c:v/>
-                  </c:pt>
-                  <c:pt idx="510">
-                    <c:v/>
-                  </c:pt>
-                  <c:pt idx="511">
-                    <c:v/>
-                  </c:pt>
-                  <c:pt idx="512">
-                    <c:v/>
-                  </c:pt>
-                  <c:pt idx="513">
-                    <c:v/>
-                  </c:pt>
-                  <c:pt idx="514">
-                    <c:v/>
-                  </c:pt>
-                  <c:pt idx="515">
-                    <c:v/>
-                  </c:pt>
-                  <c:pt idx="516">
-                    <c:v/>
-                  </c:pt>
-                  <c:pt idx="517">
-                    <c:v/>
-                  </c:pt>
-                  <c:pt idx="518">
-                    <c:v/>
-                  </c:pt>
-                  <c:pt idx="519">
-                    <c:v/>
-                  </c:pt>
-                  <c:pt idx="520">
-                    <c:v/>
-                  </c:pt>
-                  <c:pt idx="521">
-                    <c:v/>
-                  </c:pt>
-                  <c:pt idx="522">
-                    <c:v/>
-                  </c:pt>
-                  <c:pt idx="523">
-                    <c:v/>
-                  </c:pt>
-                  <c:pt idx="524">
-                    <c:v/>
-                  </c:pt>
-                  <c:pt idx="525">
-                    <c:v/>
-                  </c:pt>
-                  <c:pt idx="526">
-                    <c:v/>
-                  </c:pt>
-                  <c:pt idx="527">
-                    <c:v/>
-                  </c:pt>
-                  <c:pt idx="528">
-                    <c:v/>
-                  </c:pt>
-                  <c:pt idx="529">
-                    <c:v/>
-                  </c:pt>
-                  <c:pt idx="530">
-                    <c:v/>
-                  </c:pt>
-                  <c:pt idx="531">
-                    <c:v/>
-                  </c:pt>
-                  <c:pt idx="532">
-                    <c:v/>
-                  </c:pt>
-                  <c:pt idx="533">
-                    <c:v/>
-                  </c:pt>
-                  <c:pt idx="534">
-                    <c:v/>
-                  </c:pt>
-                  <c:pt idx="535">
-                    <c:v/>
-                  </c:pt>
-                  <c:pt idx="536">
-                    <c:v/>
-                  </c:pt>
-                  <c:pt idx="537">
-                    <c:v/>
-                  </c:pt>
-                  <c:pt idx="538">
-                    <c:v/>
-                  </c:pt>
-                  <c:pt idx="539">
-                    <c:v/>
-                  </c:pt>
-                  <c:pt idx="540">
-                    <c:v/>
-                  </c:pt>
-                  <c:pt idx="541">
-                    <c:v/>
-                  </c:pt>
-                  <c:pt idx="542">
-                    <c:v/>
-                  </c:pt>
-                  <c:pt idx="543">
-                    <c:v/>
-                  </c:pt>
-                  <c:pt idx="544">
-                    <c:v/>
-                  </c:pt>
-                  <c:pt idx="545">
-                    <c:v/>
-                  </c:pt>
-                  <c:pt idx="546">
-                    <c:v/>
-                  </c:pt>
-                  <c:pt idx="547">
-                    <c:v/>
-                  </c:pt>
-                  <c:pt idx="548">
-                    <c:v/>
-                  </c:pt>
-                  <c:pt idx="549">
-                    <c:v/>
-                  </c:pt>
-                  <c:pt idx="550">
-                    <c:v/>
-                  </c:pt>
-                  <c:pt idx="551">
-                    <c:v/>
-                  </c:pt>
-                  <c:pt idx="552">
-                    <c:v/>
-                  </c:pt>
-                  <c:pt idx="553">
-                    <c:v/>
-                  </c:pt>
-                  <c:pt idx="554">
-                    <c:v/>
-                  </c:pt>
-                  <c:pt idx="555">
-                    <c:v/>
-                  </c:pt>
-                  <c:pt idx="556">
-                    <c:v/>
-                  </c:pt>
-                  <c:pt idx="557">
-                    <c:v/>
-                  </c:pt>
-                  <c:pt idx="558">
-                    <c:v/>
-                  </c:pt>
-                  <c:pt idx="559">
-                    <c:v/>
-                  </c:pt>
-                  <c:pt idx="560">
-                    <c:v/>
-                  </c:pt>
-                  <c:pt idx="561">
-                    <c:v/>
-                  </c:pt>
-                  <c:pt idx="562">
-                    <c:v/>
-                  </c:pt>
-                  <c:pt idx="563">
-                    <c:v/>
-                  </c:pt>
-                  <c:pt idx="564">
-                    <c:v/>
-                  </c:pt>
-                  <c:pt idx="565">
-                    <c:v/>
-                  </c:pt>
-                  <c:pt idx="566">
-                    <c:v/>
-                  </c:pt>
-                  <c:pt idx="567">
-                    <c:v/>
-                  </c:pt>
-                  <c:pt idx="568">
-                    <c:v/>
-                  </c:pt>
-                  <c:pt idx="569">
-                    <c:v/>
-                  </c:pt>
-                  <c:pt idx="570">
-                    <c:v/>
-                  </c:pt>
-                  <c:pt idx="571">
-                    <c:v/>
-                  </c:pt>
-                  <c:pt idx="572">
-                    <c:v/>
-                  </c:pt>
-                  <c:pt idx="573">
-                    <c:v/>
-                  </c:pt>
-                  <c:pt idx="574">
-                    <c:v/>
-                  </c:pt>
-                  <c:pt idx="575">
-                    <c:v/>
-                  </c:pt>
                   <c:pt idx="576">
                     <c:v>23/02</c:v>
-                  </c:pt>
-                  <c:pt idx="577">
-                    <c:v/>
-                  </c:pt>
-                  <c:pt idx="578">
-                    <c:v/>
-                  </c:pt>
-                  <c:pt idx="579">
-                    <c:v/>
-                  </c:pt>
-                  <c:pt idx="580">
-                    <c:v/>
-                  </c:pt>
-                  <c:pt idx="581">
-                    <c:v/>
-                  </c:pt>
-                  <c:pt idx="582">
-                    <c:v/>
-                  </c:pt>
-                  <c:pt idx="583">
-                    <c:v/>
-                  </c:pt>
-                  <c:pt idx="584">
-                    <c:v/>
-                  </c:pt>
-                  <c:pt idx="585">
-                    <c:v/>
-                  </c:pt>
-                  <c:pt idx="586">
-                    <c:v/>
-                  </c:pt>
-                  <c:pt idx="587">
-                    <c:v/>
-                  </c:pt>
-                  <c:pt idx="588">
-                    <c:v/>
-                  </c:pt>
-                  <c:pt idx="589">
-                    <c:v/>
-                  </c:pt>
-                  <c:pt idx="590">
-                    <c:v/>
-                  </c:pt>
-                  <c:pt idx="591">
-                    <c:v/>
-                  </c:pt>
-                  <c:pt idx="592">
-                    <c:v/>
-                  </c:pt>
-                  <c:pt idx="593">
-                    <c:v/>
-                  </c:pt>
-                  <c:pt idx="594">
-                    <c:v/>
-                  </c:pt>
-                  <c:pt idx="595">
-                    <c:v/>
-                  </c:pt>
-                  <c:pt idx="596">
-                    <c:v/>
-                  </c:pt>
-                  <c:pt idx="597">
-                    <c:v/>
-                  </c:pt>
-                  <c:pt idx="598">
-                    <c:v/>
-                  </c:pt>
-                  <c:pt idx="599">
-                    <c:v/>
-                  </c:pt>
-                  <c:pt idx="600">
-                    <c:v/>
-                  </c:pt>
-                  <c:pt idx="601">
-                    <c:v/>
-                  </c:pt>
-                  <c:pt idx="602">
-                    <c:v/>
-                  </c:pt>
-                  <c:pt idx="603">
-                    <c:v/>
-                  </c:pt>
-                  <c:pt idx="604">
-                    <c:v/>
-                  </c:pt>
-                  <c:pt idx="605">
-                    <c:v/>
-                  </c:pt>
-                  <c:pt idx="606">
-                    <c:v/>
-                  </c:pt>
-                  <c:pt idx="607">
-                    <c:v/>
-                  </c:pt>
-                  <c:pt idx="608">
-                    <c:v/>
-                  </c:pt>
-                  <c:pt idx="609">
-                    <c:v/>
-                  </c:pt>
-                  <c:pt idx="610">
-                    <c:v/>
-                  </c:pt>
-                  <c:pt idx="611">
-                    <c:v/>
-                  </c:pt>
-                  <c:pt idx="612">
-                    <c:v/>
-                  </c:pt>
-                  <c:pt idx="613">
-                    <c:v/>
-                  </c:pt>
-                  <c:pt idx="614">
-                    <c:v/>
-                  </c:pt>
-                  <c:pt idx="615">
-                    <c:v/>
-                  </c:pt>
-                  <c:pt idx="616">
-                    <c:v/>
-                  </c:pt>
-                  <c:pt idx="617">
-                    <c:v/>
-                  </c:pt>
-                  <c:pt idx="618">
-                    <c:v/>
-                  </c:pt>
-                  <c:pt idx="619">
-                    <c:v/>
-                  </c:pt>
-                  <c:pt idx="620">
-                    <c:v/>
-                  </c:pt>
-                  <c:pt idx="621">
-                    <c:v/>
-                  </c:pt>
-                  <c:pt idx="622">
-                    <c:v/>
-                  </c:pt>
-                  <c:pt idx="623">
-                    <c:v/>
-                  </c:pt>
-                  <c:pt idx="624">
-                    <c:v/>
-                  </c:pt>
-                  <c:pt idx="625">
-                    <c:v/>
-                  </c:pt>
-                  <c:pt idx="626">
-                    <c:v/>
-                  </c:pt>
-                  <c:pt idx="627">
-                    <c:v/>
-                  </c:pt>
-                  <c:pt idx="628">
-                    <c:v/>
-                  </c:pt>
-                  <c:pt idx="629">
-                    <c:v/>
-                  </c:pt>
-                  <c:pt idx="630">
-                    <c:v/>
-                  </c:pt>
-                  <c:pt idx="631">
-                    <c:v/>
-                  </c:pt>
-                  <c:pt idx="632">
-                    <c:v/>
-                  </c:pt>
-                  <c:pt idx="633">
-                    <c:v/>
-                  </c:pt>
-                  <c:pt idx="634">
-                    <c:v/>
-                  </c:pt>
-                  <c:pt idx="635">
-                    <c:v/>
-                  </c:pt>
-                  <c:pt idx="636">
-                    <c:v/>
-                  </c:pt>
-                  <c:pt idx="637">
-                    <c:v/>
-                  </c:pt>
-                  <c:pt idx="638">
-                    <c:v/>
-                  </c:pt>
-                  <c:pt idx="639">
-                    <c:v/>
-                  </c:pt>
-                  <c:pt idx="640">
-                    <c:v/>
-                  </c:pt>
-                  <c:pt idx="641">
-                    <c:v/>
-                  </c:pt>
-                  <c:pt idx="642">
-                    <c:v/>
-                  </c:pt>
-                  <c:pt idx="643">
-                    <c:v/>
-                  </c:pt>
-                  <c:pt idx="644">
-                    <c:v/>
-                  </c:pt>
-                  <c:pt idx="645">
-                    <c:v/>
-                  </c:pt>
-                  <c:pt idx="646">
-                    <c:v/>
-                  </c:pt>
-                  <c:pt idx="647">
-                    <c:v/>
-                  </c:pt>
-                  <c:pt idx="648">
-                    <c:v/>
-                  </c:pt>
-                  <c:pt idx="649">
-                    <c:v/>
-                  </c:pt>
-                  <c:pt idx="650">
-                    <c:v/>
-                  </c:pt>
-                  <c:pt idx="651">
-                    <c:v/>
-                  </c:pt>
-                  <c:pt idx="652">
-                    <c:v/>
-                  </c:pt>
-                  <c:pt idx="653">
-                    <c:v/>
-                  </c:pt>
-                  <c:pt idx="654">
-                    <c:v/>
-                  </c:pt>
-                  <c:pt idx="655">
-                    <c:v/>
-                  </c:pt>
-                  <c:pt idx="656">
-                    <c:v/>
-                  </c:pt>
-                  <c:pt idx="657">
-                    <c:v/>
-                  </c:pt>
-                  <c:pt idx="658">
-                    <c:v/>
-                  </c:pt>
-                  <c:pt idx="659">
-                    <c:v/>
-                  </c:pt>
-                  <c:pt idx="660">
-                    <c:v/>
-                  </c:pt>
-                  <c:pt idx="661">
-                    <c:v/>
-                  </c:pt>
-                  <c:pt idx="662">
-                    <c:v/>
-                  </c:pt>
-                  <c:pt idx="663">
-                    <c:v/>
-                  </c:pt>
-                  <c:pt idx="664">
-                    <c:v/>
-                  </c:pt>
-                  <c:pt idx="665">
-                    <c:v/>
-                  </c:pt>
-                  <c:pt idx="666">
-                    <c:v/>
-                  </c:pt>
-                  <c:pt idx="667">
-                    <c:v/>
-                  </c:pt>
-                  <c:pt idx="668">
-                    <c:v/>
-                  </c:pt>
-                  <c:pt idx="669">
-                    <c:v/>
-                  </c:pt>
-                  <c:pt idx="670">
-                    <c:v/>
-                  </c:pt>
-                  <c:pt idx="671">
-                    <c:v/>
-                  </c:pt>
-                  <c:pt idx="672">
-                    <c:v/>
-                  </c:pt>
-                  <c:pt idx="673">
-                    <c:v/>
-                  </c:pt>
-                  <c:pt idx="674">
-                    <c:v/>
-                  </c:pt>
-                  <c:pt idx="675">
-                    <c:v/>
-                  </c:pt>
-                  <c:pt idx="676">
-                    <c:v/>
-                  </c:pt>
-                  <c:pt idx="677">
-                    <c:v/>
-                  </c:pt>
-                  <c:pt idx="678">
-                    <c:v/>
-                  </c:pt>
-                  <c:pt idx="679">
-                    <c:v/>
-                  </c:pt>
-                  <c:pt idx="680">
-                    <c:v/>
-                  </c:pt>
-                  <c:pt idx="681">
-                    <c:v/>
-                  </c:pt>
-                  <c:pt idx="682">
-                    <c:v/>
-                  </c:pt>
-                  <c:pt idx="683">
-                    <c:v/>
-                  </c:pt>
-                  <c:pt idx="684">
-                    <c:v/>
-                  </c:pt>
-                  <c:pt idx="685">
-                    <c:v/>
-                  </c:pt>
-                  <c:pt idx="686">
-                    <c:v/>
-                  </c:pt>
-                  <c:pt idx="687">
-                    <c:v/>
-                  </c:pt>
-                  <c:pt idx="688">
-                    <c:v/>
-                  </c:pt>
-                  <c:pt idx="689">
-                    <c:v/>
-                  </c:pt>
-                  <c:pt idx="690">
-                    <c:v/>
-                  </c:pt>
-                  <c:pt idx="691">
-                    <c:v/>
-                  </c:pt>
-                  <c:pt idx="692">
-                    <c:v/>
-                  </c:pt>
-                  <c:pt idx="693">
-                    <c:v/>
-                  </c:pt>
-                  <c:pt idx="694">
-                    <c:v/>
-                  </c:pt>
-                  <c:pt idx="695">
-                    <c:v/>
-                  </c:pt>
-                  <c:pt idx="696">
-                    <c:v/>
-                  </c:pt>
-                  <c:pt idx="697">
-                    <c:v/>
-                  </c:pt>
-                  <c:pt idx="698">
-                    <c:v/>
-                  </c:pt>
-                  <c:pt idx="699">
-                    <c:v/>
-                  </c:pt>
-                  <c:pt idx="700">
-                    <c:v/>
-                  </c:pt>
-                  <c:pt idx="701">
-                    <c:v/>
-                  </c:pt>
-                  <c:pt idx="702">
-                    <c:v/>
-                  </c:pt>
-                  <c:pt idx="703">
-                    <c:v/>
-                  </c:pt>
-                  <c:pt idx="704">
-                    <c:v/>
-                  </c:pt>
-                  <c:pt idx="705">
-                    <c:v/>
-                  </c:pt>
-                  <c:pt idx="706">
-                    <c:v/>
-                  </c:pt>
-                  <c:pt idx="707">
-                    <c:v/>
-                  </c:pt>
-                  <c:pt idx="708">
-                    <c:v/>
-                  </c:pt>
-                  <c:pt idx="709">
-                    <c:v/>
-                  </c:pt>
-                  <c:pt idx="710">
-                    <c:v/>
-                  </c:pt>
-                  <c:pt idx="711">
-                    <c:v/>
-                  </c:pt>
-                  <c:pt idx="712">
-                    <c:v/>
-                  </c:pt>
-                  <c:pt idx="713">
-                    <c:v/>
-                  </c:pt>
-                  <c:pt idx="714">
-                    <c:v/>
-                  </c:pt>
-                  <c:pt idx="715">
-                    <c:v/>
-                  </c:pt>
-                  <c:pt idx="716">
-                    <c:v/>
-                  </c:pt>
-                  <c:pt idx="717">
-                    <c:v/>
-                  </c:pt>
-                  <c:pt idx="718">
-                    <c:v/>
-                  </c:pt>
-                  <c:pt idx="719">
-                    <c:v/>
-                  </c:pt>
-                  <c:pt idx="720">
-                    <c:v/>
-                  </c:pt>
-                  <c:pt idx="721">
-                    <c:v/>
-                  </c:pt>
-                  <c:pt idx="722">
-                    <c:v/>
-                  </c:pt>
-                  <c:pt idx="723">
-                    <c:v/>
-                  </c:pt>
-                  <c:pt idx="724">
-                    <c:v/>
-                  </c:pt>
-                  <c:pt idx="725">
-                    <c:v/>
-                  </c:pt>
-                  <c:pt idx="726">
-                    <c:v/>
-                  </c:pt>
-                  <c:pt idx="727">
-                    <c:v/>
-                  </c:pt>
-                  <c:pt idx="728">
-                    <c:v/>
-                  </c:pt>
-                  <c:pt idx="729">
-                    <c:v/>
-                  </c:pt>
-                  <c:pt idx="730">
-                    <c:v/>
-                  </c:pt>
-                  <c:pt idx="731">
-                    <c:v/>
-                  </c:pt>
-                  <c:pt idx="732">
-                    <c:v/>
-                  </c:pt>
-                  <c:pt idx="733">
-                    <c:v/>
-                  </c:pt>
-                  <c:pt idx="734">
-                    <c:v/>
-                  </c:pt>
-                  <c:pt idx="735">
-                    <c:v/>
-                  </c:pt>
-                  <c:pt idx="736">
-                    <c:v/>
-                  </c:pt>
-                  <c:pt idx="737">
-                    <c:v/>
-                  </c:pt>
-                  <c:pt idx="738">
-                    <c:v/>
-                  </c:pt>
-                  <c:pt idx="739">
-                    <c:v/>
-                  </c:pt>
-                  <c:pt idx="740">
-                    <c:v/>
-                  </c:pt>
-                  <c:pt idx="741">
-                    <c:v/>
-                  </c:pt>
-                  <c:pt idx="742">
-                    <c:v/>
-                  </c:pt>
-                  <c:pt idx="743">
-                    <c:v/>
-                  </c:pt>
-                  <c:pt idx="744">
-                    <c:v/>
-                  </c:pt>
-                  <c:pt idx="745">
-                    <c:v/>
-                  </c:pt>
-                  <c:pt idx="746">
-                    <c:v/>
-                  </c:pt>
-                  <c:pt idx="747">
-                    <c:v/>
-                  </c:pt>
-                  <c:pt idx="748">
-                    <c:v/>
-                  </c:pt>
-                  <c:pt idx="749">
-                    <c:v/>
-                  </c:pt>
-                  <c:pt idx="750">
-                    <c:v/>
-                  </c:pt>
-                  <c:pt idx="751">
-                    <c:v/>
-                  </c:pt>
-                  <c:pt idx="752">
-                    <c:v/>
-                  </c:pt>
-                  <c:pt idx="753">
-                    <c:v/>
-                  </c:pt>
-                  <c:pt idx="754">
-                    <c:v/>
-                  </c:pt>
-                  <c:pt idx="755">
-                    <c:v/>
-                  </c:pt>
-                  <c:pt idx="756">
-                    <c:v/>
-                  </c:pt>
-                  <c:pt idx="757">
-                    <c:v/>
-                  </c:pt>
-                  <c:pt idx="758">
-                    <c:v/>
-                  </c:pt>
-                  <c:pt idx="759">
-                    <c:v/>
-                  </c:pt>
-                  <c:pt idx="760">
-                    <c:v/>
-                  </c:pt>
-                  <c:pt idx="761">
-                    <c:v/>
-                  </c:pt>
-                  <c:pt idx="762">
-                    <c:v/>
-                  </c:pt>
-                  <c:pt idx="763">
-                    <c:v/>
-                  </c:pt>
-                  <c:pt idx="764">
-                    <c:v/>
-                  </c:pt>
-                  <c:pt idx="765">
-                    <c:v/>
-                  </c:pt>
-                  <c:pt idx="766">
-                    <c:v/>
-                  </c:pt>
-                  <c:pt idx="767">
-                    <c:v/>
-                  </c:pt>
-                  <c:pt idx="768">
-                    <c:v/>
-                  </c:pt>
-                  <c:pt idx="769">
-                    <c:v/>
-                  </c:pt>
-                  <c:pt idx="770">
-                    <c:v/>
-                  </c:pt>
-                  <c:pt idx="771">
-                    <c:v/>
-                  </c:pt>
-                  <c:pt idx="772">
-                    <c:v/>
-                  </c:pt>
-                  <c:pt idx="773">
-                    <c:v/>
-                  </c:pt>
-                  <c:pt idx="774">
-                    <c:v/>
-                  </c:pt>
-                  <c:pt idx="775">
-                    <c:v/>
-                  </c:pt>
-                  <c:pt idx="776">
-                    <c:v/>
-                  </c:pt>
-                  <c:pt idx="777">
-                    <c:v/>
-                  </c:pt>
-                  <c:pt idx="778">
-                    <c:v/>
-                  </c:pt>
-                  <c:pt idx="779">
-                    <c:v/>
-                  </c:pt>
-                  <c:pt idx="780">
-                    <c:v/>
-                  </c:pt>
-                  <c:pt idx="781">
-                    <c:v/>
-                  </c:pt>
-                  <c:pt idx="782">
-                    <c:v/>
-                  </c:pt>
-                  <c:pt idx="783">
-                    <c:v/>
-                  </c:pt>
-                  <c:pt idx="784">
-                    <c:v/>
-                  </c:pt>
-                  <c:pt idx="785">
-                    <c:v/>
-                  </c:pt>
-                  <c:pt idx="786">
-                    <c:v/>
-                  </c:pt>
-                  <c:pt idx="787">
-                    <c:v/>
-                  </c:pt>
-                  <c:pt idx="788">
-                    <c:v/>
-                  </c:pt>
-                  <c:pt idx="789">
-                    <c:v/>
-                  </c:pt>
-                  <c:pt idx="790">
-                    <c:v/>
-                  </c:pt>
-                  <c:pt idx="791">
-                    <c:v/>
-                  </c:pt>
-                  <c:pt idx="792">
-                    <c:v/>
-                  </c:pt>
-                  <c:pt idx="793">
-                    <c:v/>
-                  </c:pt>
-                  <c:pt idx="794">
-                    <c:v/>
-                  </c:pt>
-                  <c:pt idx="795">
-                    <c:v/>
-                  </c:pt>
-                  <c:pt idx="796">
-                    <c:v/>
-                  </c:pt>
-                  <c:pt idx="797">
-                    <c:v/>
-                  </c:pt>
-                  <c:pt idx="798">
-                    <c:v/>
-                  </c:pt>
-                  <c:pt idx="799">
-                    <c:v/>
-                  </c:pt>
-                  <c:pt idx="800">
-                    <c:v/>
-                  </c:pt>
-                  <c:pt idx="801">
-                    <c:v/>
-                  </c:pt>
-                  <c:pt idx="802">
-                    <c:v/>
-                  </c:pt>
-                  <c:pt idx="803">
-                    <c:v/>
-                  </c:pt>
-                  <c:pt idx="804">
-                    <c:v/>
-                  </c:pt>
-                  <c:pt idx="805">
-                    <c:v/>
-                  </c:pt>
-                  <c:pt idx="806">
-                    <c:v/>
-                  </c:pt>
-                  <c:pt idx="807">
-                    <c:v/>
-                  </c:pt>
-                  <c:pt idx="808">
-                    <c:v/>
-                  </c:pt>
-                  <c:pt idx="809">
-                    <c:v/>
-                  </c:pt>
-                  <c:pt idx="810">
-                    <c:v/>
-                  </c:pt>
-                  <c:pt idx="811">
-                    <c:v/>
-                  </c:pt>
-                  <c:pt idx="812">
-                    <c:v/>
-                  </c:pt>
-                  <c:pt idx="813">
-                    <c:v/>
-                  </c:pt>
-                  <c:pt idx="814">
-                    <c:v/>
-                  </c:pt>
-                  <c:pt idx="815">
-                    <c:v/>
-                  </c:pt>
-                  <c:pt idx="816">
-                    <c:v/>
-                  </c:pt>
-                  <c:pt idx="817">
-                    <c:v/>
-                  </c:pt>
-                  <c:pt idx="818">
-                    <c:v/>
-                  </c:pt>
-                  <c:pt idx="819">
-                    <c:v/>
-                  </c:pt>
-                  <c:pt idx="820">
-                    <c:v/>
-                  </c:pt>
-                  <c:pt idx="821">
-                    <c:v/>
-                  </c:pt>
-                  <c:pt idx="822">
-                    <c:v/>
-                  </c:pt>
-                  <c:pt idx="823">
-                    <c:v/>
-                  </c:pt>
-                  <c:pt idx="824">
-                    <c:v/>
-                  </c:pt>
-                  <c:pt idx="825">
-                    <c:v/>
-                  </c:pt>
-                  <c:pt idx="826">
-                    <c:v/>
-                  </c:pt>
-                  <c:pt idx="827">
-                    <c:v/>
-                  </c:pt>
-                  <c:pt idx="828">
-                    <c:v/>
-                  </c:pt>
-                  <c:pt idx="829">
-                    <c:v/>
-                  </c:pt>
-                  <c:pt idx="830">
-                    <c:v/>
-                  </c:pt>
-                  <c:pt idx="831">
-                    <c:v/>
-                  </c:pt>
-                  <c:pt idx="832">
-                    <c:v/>
-                  </c:pt>
-                  <c:pt idx="833">
-                    <c:v/>
-                  </c:pt>
-                  <c:pt idx="834">
-                    <c:v/>
-                  </c:pt>
-                  <c:pt idx="835">
-                    <c:v/>
-                  </c:pt>
-                  <c:pt idx="836">
-                    <c:v/>
-                  </c:pt>
-                  <c:pt idx="837">
-                    <c:v/>
-                  </c:pt>
-                  <c:pt idx="838">
-                    <c:v/>
-                  </c:pt>
-                  <c:pt idx="839">
-                    <c:v/>
-                  </c:pt>
-                  <c:pt idx="840">
-                    <c:v/>
-                  </c:pt>
-                  <c:pt idx="841">
-                    <c:v/>
-                  </c:pt>
-                  <c:pt idx="842">
-                    <c:v/>
-                  </c:pt>
-                  <c:pt idx="843">
-                    <c:v/>
-                  </c:pt>
-                  <c:pt idx="844">
-                    <c:v/>
-                  </c:pt>
-                  <c:pt idx="845">
-                    <c:v/>
-                  </c:pt>
-                  <c:pt idx="846">
-                    <c:v/>
-                  </c:pt>
-                  <c:pt idx="847">
-                    <c:v/>
-                  </c:pt>
-                  <c:pt idx="848">
-                    <c:v/>
-                  </c:pt>
-                  <c:pt idx="849">
-                    <c:v/>
-                  </c:pt>
-                  <c:pt idx="850">
-                    <c:v/>
-                  </c:pt>
-                  <c:pt idx="851">
-                    <c:v/>
-                  </c:pt>
-                  <c:pt idx="852">
-                    <c:v/>
-                  </c:pt>
-                  <c:pt idx="853">
-                    <c:v/>
-                  </c:pt>
-                  <c:pt idx="854">
-                    <c:v/>
-                  </c:pt>
-                  <c:pt idx="855">
-                    <c:v/>
-                  </c:pt>
-                  <c:pt idx="856">
-                    <c:v/>
-                  </c:pt>
-                  <c:pt idx="857">
-                    <c:v/>
-                  </c:pt>
-                  <c:pt idx="858">
-                    <c:v/>
-                  </c:pt>
-                  <c:pt idx="859">
-                    <c:v/>
-                  </c:pt>
-                  <c:pt idx="860">
-                    <c:v/>
-                  </c:pt>
-                  <c:pt idx="861">
-                    <c:v/>
-                  </c:pt>
-                  <c:pt idx="862">
-                    <c:v/>
-                  </c:pt>
-                  <c:pt idx="863">
-                    <c:v/>
                   </c:pt>
                 </c:lvl>
               </c:multiLvlStrCache>
@@ -40585,45 +32881,6 @@
                 <c:pt idx="460">
                   <c:v>2.457</c:v>
                 </c:pt>
-                <c:pt idx="461">
-                  <c:v/>
-                </c:pt>
-                <c:pt idx="462">
-                  <c:v/>
-                </c:pt>
-                <c:pt idx="463">
-                  <c:v/>
-                </c:pt>
-                <c:pt idx="464">
-                  <c:v/>
-                </c:pt>
-                <c:pt idx="465">
-                  <c:v/>
-                </c:pt>
-                <c:pt idx="466">
-                  <c:v/>
-                </c:pt>
-                <c:pt idx="467">
-                  <c:v/>
-                </c:pt>
-                <c:pt idx="468">
-                  <c:v/>
-                </c:pt>
-                <c:pt idx="469">
-                  <c:v/>
-                </c:pt>
-                <c:pt idx="470">
-                  <c:v/>
-                </c:pt>
-                <c:pt idx="471">
-                  <c:v/>
-                </c:pt>
-                <c:pt idx="472">
-                  <c:v/>
-                </c:pt>
-                <c:pt idx="473">
-                  <c:v/>
-                </c:pt>
                 <c:pt idx="474">
                   <c:v>2.106</c:v>
                 </c:pt>
@@ -41775,9 +34032,6 @@
                 </c:pt>
                 <c:pt idx="857">
                   <c:v>0</c:v>
-                </c:pt>
-                <c:pt idx="858">
-                  <c:v/>
                 </c:pt>
                 <c:pt idx="859">
                   <c:v>0</c:v>
